--- a/AgenticAI/2-Core-Concepts/4_memory_in_agents.pptx
+++ b/AgenticAI/2-Core-Concepts/4_memory_in_agents.pptx
@@ -223,7 +223,7 @@
           <a:p>
             <a:fld id="{7BAEECA8-D063-486F-AE31-5020270C1449}" type="datetimeFigureOut">
               <a:rPr lang="en-US" smtClean="0"/>
-              <a:t>4/29/2026</a:t>
+              <a:t>9/13/2026</a:t>
             </a:fld>
             <a:endParaRPr lang="en-US"/>
           </a:p>
@@ -400,7 +400,7 @@
           <a:p>
             <a:fld id="{CB233BD1-3BA8-448D-9D08-7846095EA517}" type="datetimeFigureOut">
               <a:rPr lang="en-US" smtClean="0"/>
-              <a:t>4/29/2026</a:t>
+              <a:t>9/13/2026</a:t>
             </a:fld>
             <a:endParaRPr lang="en-US"/>
           </a:p>
@@ -814,7 +814,7 @@
           <a:p>
             <a:fld id="{6383FAE1-13DE-4511-8C1B-C8AFB720664C}" type="datetimeFigureOut">
               <a:rPr lang="en-US" smtClean="0"/>
-              <a:t>4/29/2026</a:t>
+              <a:t>9/13/2026</a:t>
             </a:fld>
             <a:endParaRPr lang="en-US"/>
           </a:p>
@@ -1012,7 +1012,7 @@
           <a:p>
             <a:fld id="{6383FAE1-13DE-4511-8C1B-C8AFB720664C}" type="datetimeFigureOut">
               <a:rPr lang="en-US" smtClean="0"/>
-              <a:t>4/29/2026</a:t>
+              <a:t>9/13/2026</a:t>
             </a:fld>
             <a:endParaRPr lang="en-US"/>
           </a:p>
@@ -1220,7 +1220,7 @@
           <a:p>
             <a:fld id="{6383FAE1-13DE-4511-8C1B-C8AFB720664C}" type="datetimeFigureOut">
               <a:rPr lang="en-US" smtClean="0"/>
-              <a:t>4/29/2026</a:t>
+              <a:t>9/13/2026</a:t>
             </a:fld>
             <a:endParaRPr lang="en-US"/>
           </a:p>
@@ -1418,7 +1418,7 @@
           <a:p>
             <a:fld id="{6383FAE1-13DE-4511-8C1B-C8AFB720664C}" type="datetimeFigureOut">
               <a:rPr lang="en-US" smtClean="0"/>
-              <a:t>4/29/2026</a:t>
+              <a:t>9/13/2026</a:t>
             </a:fld>
             <a:endParaRPr lang="en-US"/>
           </a:p>
@@ -1693,7 +1693,7 @@
           <a:p>
             <a:fld id="{6383FAE1-13DE-4511-8C1B-C8AFB720664C}" type="datetimeFigureOut">
               <a:rPr lang="en-US" smtClean="0"/>
-              <a:t>4/29/2026</a:t>
+              <a:t>9/13/2026</a:t>
             </a:fld>
             <a:endParaRPr lang="en-US"/>
           </a:p>
@@ -1958,7 +1958,7 @@
           <a:p>
             <a:fld id="{6383FAE1-13DE-4511-8C1B-C8AFB720664C}" type="datetimeFigureOut">
               <a:rPr lang="en-US" smtClean="0"/>
-              <a:t>4/29/2026</a:t>
+              <a:t>9/13/2026</a:t>
             </a:fld>
             <a:endParaRPr lang="en-US"/>
           </a:p>
@@ -2370,7 +2370,7 @@
           <a:p>
             <a:fld id="{6383FAE1-13DE-4511-8C1B-C8AFB720664C}" type="datetimeFigureOut">
               <a:rPr lang="en-US" smtClean="0"/>
-              <a:t>4/29/2026</a:t>
+              <a:t>9/13/2026</a:t>
             </a:fld>
             <a:endParaRPr lang="en-US"/>
           </a:p>
@@ -2511,7 +2511,7 @@
           <a:p>
             <a:fld id="{6383FAE1-13DE-4511-8C1B-C8AFB720664C}" type="datetimeFigureOut">
               <a:rPr lang="en-US" smtClean="0"/>
-              <a:t>4/29/2026</a:t>
+              <a:t>9/13/2026</a:t>
             </a:fld>
             <a:endParaRPr lang="en-US"/>
           </a:p>
@@ -2624,7 +2624,7 @@
           <a:p>
             <a:fld id="{6383FAE1-13DE-4511-8C1B-C8AFB720664C}" type="datetimeFigureOut">
               <a:rPr lang="en-US" smtClean="0"/>
-              <a:t>4/29/2026</a:t>
+              <a:t>9/13/2026</a:t>
             </a:fld>
             <a:endParaRPr lang="en-US"/>
           </a:p>
@@ -2935,7 +2935,7 @@
           <a:p>
             <a:fld id="{6383FAE1-13DE-4511-8C1B-C8AFB720664C}" type="datetimeFigureOut">
               <a:rPr lang="en-US" smtClean="0"/>
-              <a:t>4/29/2026</a:t>
+              <a:t>9/13/2026</a:t>
             </a:fld>
             <a:endParaRPr lang="en-US"/>
           </a:p>
@@ -3226,7 +3226,7 @@
           <a:p>
             <a:fld id="{6383FAE1-13DE-4511-8C1B-C8AFB720664C}" type="datetimeFigureOut">
               <a:rPr lang="en-US" smtClean="0"/>
-              <a:t>4/29/2026</a:t>
+              <a:t>9/13/2026</a:t>
             </a:fld>
             <a:endParaRPr lang="en-US"/>
           </a:p>
@@ -3470,7 +3470,7 @@
           <a:p>
             <a:fld id="{6383FAE1-13DE-4511-8C1B-C8AFB720664C}" type="datetimeFigureOut">
               <a:rPr lang="en-US" smtClean="0"/>
-              <a:t>4/29/2026</a:t>
+              <a:t>9/13/2026</a:t>
             </a:fld>
             <a:endParaRPr lang="en-US"/>
           </a:p>
@@ -5221,168 +5221,6 @@
           <a:chExt cx="0" cy="0"/>
         </a:xfrm>
       </p:grpSpPr>
-      <p:sp>
-        <p:nvSpPr>
-          <p:cNvPr id="2" name="Title 1">
-            <a:extLst>
-              <a:ext uri="{FF2B5EF4-FFF2-40B4-BE49-F238E27FC236}">
-                <a16:creationId xmlns:a16="http://schemas.microsoft.com/office/drawing/2014/main" id="{795E1B75-886E-0812-B2FD-DD250C225521}"/>
-              </a:ext>
-            </a:extLst>
-          </p:cNvPr>
-          <p:cNvSpPr>
-            <a:spLocks noGrp="1"/>
-          </p:cNvSpPr>
-          <p:nvPr>
-            <p:ph type="title"/>
-          </p:nvPr>
-        </p:nvSpPr>
-        <p:spPr>
-          <a:xfrm>
-            <a:off x="274320" y="136525"/>
-            <a:ext cx="11466576" cy="832739"/>
-          </a:xfrm>
-        </p:spPr>
-        <p:txBody>
-          <a:bodyPr>
-            <a:normAutofit/>
-          </a:bodyPr>
-          <a:lstStyle/>
-          <a:p>
-            <a:r>
-              <a:rPr lang="en-US" sz="3600" dirty="0"/>
-              <a:t>EXTRA</a:t>
-            </a:r>
-          </a:p>
-        </p:txBody>
-      </p:sp>
-      <p:sp>
-        <p:nvSpPr>
-          <p:cNvPr id="4" name="TextBox 3">
-            <a:extLst>
-              <a:ext uri="{FF2B5EF4-FFF2-40B4-BE49-F238E27FC236}">
-                <a16:creationId xmlns:a16="http://schemas.microsoft.com/office/drawing/2014/main" id="{902F8BE4-9CEA-0DAD-0357-E0A8215F169D}"/>
-              </a:ext>
-            </a:extLst>
-          </p:cNvPr>
-          <p:cNvSpPr txBox="1"/>
-          <p:nvPr/>
-        </p:nvSpPr>
-        <p:spPr>
-          <a:xfrm>
-            <a:off x="274320" y="933117"/>
-            <a:ext cx="11658600" cy="1477328"/>
-          </a:xfrm>
-          <a:prstGeom prst="rect">
-            <a:avLst/>
-          </a:prstGeom>
-          <a:noFill/>
-        </p:spPr>
-        <p:txBody>
-          <a:bodyPr wrap="square">
-            <a:spAutoFit/>
-          </a:bodyPr>
-          <a:lstStyle/>
-          <a:p>
-            <a:pPr marL="0" indent="0">
-              <a:buNone/>
-            </a:pPr>
-            <a:r>
-              <a:rPr lang="en-US" dirty="0" err="1">
-                <a:solidFill>
-                  <a:schemeClr val="accent6">
-                    <a:lumMod val="60000"/>
-                    <a:lumOff val="40000"/>
-                  </a:schemeClr>
-                </a:solidFill>
-              </a:rPr>
-              <a:t>Ffnbksdfd</a:t>
-            </a:r>
-            <a:endParaRPr lang="en-US" dirty="0">
-              <a:solidFill>
-                <a:schemeClr val="accent6">
-                  <a:lumMod val="60000"/>
-                  <a:lumOff val="40000"/>
-                </a:schemeClr>
-              </a:solidFill>
-            </a:endParaRPr>
-          </a:p>
-          <a:p>
-            <a:pPr marL="0" indent="0">
-              <a:buNone/>
-            </a:pPr>
-            <a:r>
-              <a:rPr lang="en-US" dirty="0" err="1">
-                <a:solidFill>
-                  <a:schemeClr val="accent6">
-                    <a:lumMod val="60000"/>
-                    <a:lumOff val="40000"/>
-                  </a:schemeClr>
-                </a:solidFill>
-              </a:rPr>
-              <a:t>Fdslj;f</a:t>
-            </a:r>
-            <a:endParaRPr lang="en-US" dirty="0">
-              <a:solidFill>
-                <a:schemeClr val="accent6">
-                  <a:lumMod val="60000"/>
-                  <a:lumOff val="40000"/>
-                </a:schemeClr>
-              </a:solidFill>
-            </a:endParaRPr>
-          </a:p>
-          <a:p>
-            <a:pPr marL="0" indent="0">
-              <a:buNone/>
-            </a:pPr>
-            <a:endParaRPr lang="en-US" dirty="0">
-              <a:solidFill>
-                <a:schemeClr val="accent6">
-                  <a:lumMod val="60000"/>
-                  <a:lumOff val="40000"/>
-                </a:schemeClr>
-              </a:solidFill>
-            </a:endParaRPr>
-          </a:p>
-          <a:p>
-            <a:pPr marL="0" indent="0">
-              <a:buNone/>
-            </a:pPr>
-            <a:r>
-              <a:rPr lang="en-US" dirty="0" err="1">
-                <a:solidFill>
-                  <a:schemeClr val="accent6">
-                    <a:lumMod val="60000"/>
-                    <a:lumOff val="40000"/>
-                  </a:schemeClr>
-                </a:solidFill>
-              </a:rPr>
-              <a:t>Fl;ds</a:t>
-            </a:r>
-            <a:endParaRPr lang="en-US" dirty="0">
-              <a:solidFill>
-                <a:schemeClr val="accent6">
-                  <a:lumMod val="60000"/>
-                  <a:lumOff val="40000"/>
-                </a:schemeClr>
-              </a:solidFill>
-            </a:endParaRPr>
-          </a:p>
-          <a:p>
-            <a:pPr marL="0" indent="0">
-              <a:buNone/>
-            </a:pPr>
-            <a:endParaRPr lang="en-US" dirty="0">
-              <a:solidFill>
-                <a:schemeClr val="accent6">
-                  <a:lumMod val="60000"/>
-                  <a:lumOff val="40000"/>
-                </a:schemeClr>
-              </a:solidFill>
-            </a:endParaRPr>
-          </a:p>
-        </p:txBody>
-      </p:sp>
     </p:spTree>
     <p:extLst>
       <p:ext uri="{BB962C8B-B14F-4D97-AF65-F5344CB8AC3E}">

--- a/AgenticAI/2-Core-Concepts/4_memory_in_agents.pptx
+++ b/AgenticAI/2-Core-Concepts/4_memory_in_agents.pptx
@@ -5,21 +5,24 @@
     <p:sldMasterId id="2147483648" r:id="rId1"/>
   </p:sldMasterIdLst>
   <p:notesMasterIdLst>
-    <p:notesMasterId r:id="rId11"/>
+    <p:notesMasterId r:id="rId14"/>
   </p:notesMasterIdLst>
   <p:handoutMasterIdLst>
-    <p:handoutMasterId r:id="rId12"/>
+    <p:handoutMasterId r:id="rId15"/>
   </p:handoutMasterIdLst>
   <p:sldIdLst>
     <p:sldId id="257" r:id="rId2"/>
     <p:sldId id="276" r:id="rId3"/>
-    <p:sldId id="278" r:id="rId4"/>
-    <p:sldId id="279" r:id="rId5"/>
-    <p:sldId id="282" r:id="rId6"/>
-    <p:sldId id="281" r:id="rId7"/>
-    <p:sldId id="277" r:id="rId8"/>
-    <p:sldId id="280" r:id="rId9"/>
-    <p:sldId id="275" r:id="rId10"/>
+    <p:sldId id="284" r:id="rId4"/>
+    <p:sldId id="285" r:id="rId5"/>
+    <p:sldId id="278" r:id="rId6"/>
+    <p:sldId id="283" r:id="rId7"/>
+    <p:sldId id="279" r:id="rId8"/>
+    <p:sldId id="282" r:id="rId9"/>
+    <p:sldId id="281" r:id="rId10"/>
+    <p:sldId id="277" r:id="rId11"/>
+    <p:sldId id="280" r:id="rId12"/>
+    <p:sldId id="275" r:id="rId13"/>
   </p:sldIdLst>
   <p:sldSz cx="12192000" cy="6858000"/>
   <p:notesSz cx="6858000" cy="9144000"/>
@@ -223,7 +226,7 @@
           <a:p>
             <a:fld id="{7BAEECA8-D063-486F-AE31-5020270C1449}" type="datetimeFigureOut">
               <a:rPr lang="en-US" smtClean="0"/>
-              <a:t>9/13/2026</a:t>
+              <a:t>9/14/2026</a:t>
             </a:fld>
             <a:endParaRPr lang="en-US"/>
           </a:p>
@@ -400,7 +403,7 @@
           <a:p>
             <a:fld id="{CB233BD1-3BA8-448D-9D08-7846095EA517}" type="datetimeFigureOut">
               <a:rPr lang="en-US" smtClean="0"/>
-              <a:t>9/13/2026</a:t>
+              <a:t>9/14/2026</a:t>
             </a:fld>
             <a:endParaRPr lang="en-US"/>
           </a:p>
@@ -814,7 +817,7 @@
           <a:p>
             <a:fld id="{6383FAE1-13DE-4511-8C1B-C8AFB720664C}" type="datetimeFigureOut">
               <a:rPr lang="en-US" smtClean="0"/>
-              <a:t>9/13/2026</a:t>
+              <a:t>9/14/2026</a:t>
             </a:fld>
             <a:endParaRPr lang="en-US"/>
           </a:p>
@@ -1012,7 +1015,7 @@
           <a:p>
             <a:fld id="{6383FAE1-13DE-4511-8C1B-C8AFB720664C}" type="datetimeFigureOut">
               <a:rPr lang="en-US" smtClean="0"/>
-              <a:t>9/13/2026</a:t>
+              <a:t>9/14/2026</a:t>
             </a:fld>
             <a:endParaRPr lang="en-US"/>
           </a:p>
@@ -1220,7 +1223,7 @@
           <a:p>
             <a:fld id="{6383FAE1-13DE-4511-8C1B-C8AFB720664C}" type="datetimeFigureOut">
               <a:rPr lang="en-US" smtClean="0"/>
-              <a:t>9/13/2026</a:t>
+              <a:t>9/14/2026</a:t>
             </a:fld>
             <a:endParaRPr lang="en-US"/>
           </a:p>
@@ -1418,7 +1421,7 @@
           <a:p>
             <a:fld id="{6383FAE1-13DE-4511-8C1B-C8AFB720664C}" type="datetimeFigureOut">
               <a:rPr lang="en-US" smtClean="0"/>
-              <a:t>9/13/2026</a:t>
+              <a:t>9/14/2026</a:t>
             </a:fld>
             <a:endParaRPr lang="en-US"/>
           </a:p>
@@ -1693,7 +1696,7 @@
           <a:p>
             <a:fld id="{6383FAE1-13DE-4511-8C1B-C8AFB720664C}" type="datetimeFigureOut">
               <a:rPr lang="en-US" smtClean="0"/>
-              <a:t>9/13/2026</a:t>
+              <a:t>9/14/2026</a:t>
             </a:fld>
             <a:endParaRPr lang="en-US"/>
           </a:p>
@@ -1958,7 +1961,7 @@
           <a:p>
             <a:fld id="{6383FAE1-13DE-4511-8C1B-C8AFB720664C}" type="datetimeFigureOut">
               <a:rPr lang="en-US" smtClean="0"/>
-              <a:t>9/13/2026</a:t>
+              <a:t>9/14/2026</a:t>
             </a:fld>
             <a:endParaRPr lang="en-US"/>
           </a:p>
@@ -2370,7 +2373,7 @@
           <a:p>
             <a:fld id="{6383FAE1-13DE-4511-8C1B-C8AFB720664C}" type="datetimeFigureOut">
               <a:rPr lang="en-US" smtClean="0"/>
-              <a:t>9/13/2026</a:t>
+              <a:t>9/14/2026</a:t>
             </a:fld>
             <a:endParaRPr lang="en-US"/>
           </a:p>
@@ -2511,7 +2514,7 @@
           <a:p>
             <a:fld id="{6383FAE1-13DE-4511-8C1B-C8AFB720664C}" type="datetimeFigureOut">
               <a:rPr lang="en-US" smtClean="0"/>
-              <a:t>9/13/2026</a:t>
+              <a:t>9/14/2026</a:t>
             </a:fld>
             <a:endParaRPr lang="en-US"/>
           </a:p>
@@ -2624,7 +2627,7 @@
           <a:p>
             <a:fld id="{6383FAE1-13DE-4511-8C1B-C8AFB720664C}" type="datetimeFigureOut">
               <a:rPr lang="en-US" smtClean="0"/>
-              <a:t>9/13/2026</a:t>
+              <a:t>9/14/2026</a:t>
             </a:fld>
             <a:endParaRPr lang="en-US"/>
           </a:p>
@@ -2935,7 +2938,7 @@
           <a:p>
             <a:fld id="{6383FAE1-13DE-4511-8C1B-C8AFB720664C}" type="datetimeFigureOut">
               <a:rPr lang="en-US" smtClean="0"/>
-              <a:t>9/13/2026</a:t>
+              <a:t>9/14/2026</a:t>
             </a:fld>
             <a:endParaRPr lang="en-US"/>
           </a:p>
@@ -3226,7 +3229,7 @@
           <a:p>
             <a:fld id="{6383FAE1-13DE-4511-8C1B-C8AFB720664C}" type="datetimeFigureOut">
               <a:rPr lang="en-US" smtClean="0"/>
-              <a:t>9/13/2026</a:t>
+              <a:t>9/14/2026</a:t>
             </a:fld>
             <a:endParaRPr lang="en-US"/>
           </a:p>
@@ -3470,7 +3473,7 @@
           <a:p>
             <a:fld id="{6383FAE1-13DE-4511-8C1B-C8AFB720664C}" type="datetimeFigureOut">
               <a:rPr lang="en-US" smtClean="0"/>
-              <a:t>9/13/2026</a:t>
+              <a:t>9/14/2026</a:t>
             </a:fld>
             <a:endParaRPr lang="en-US"/>
           </a:p>
@@ -4042,981 +4045,7 @@
 </p:sld>
 </file>
 
-<file path=ppt/slides/slide2.xml><?xml version="1.0" encoding="utf-8"?>
-<p:sld xmlns:a="http://schemas.openxmlformats.org/drawingml/2006/main" xmlns:r="http://schemas.openxmlformats.org/officeDocument/2006/relationships" xmlns:p="http://schemas.openxmlformats.org/presentationml/2006/main">
-  <p:cSld>
-    <p:spTree>
-      <p:nvGrpSpPr>
-        <p:cNvPr id="1" name="">
-          <a:extLst>
-            <a:ext uri="{FF2B5EF4-FFF2-40B4-BE49-F238E27FC236}">
-              <a16:creationId xmlns:a16="http://schemas.microsoft.com/office/drawing/2014/main" id="{529EBDA7-B44E-B824-B04A-1C6D1FB40ED7}"/>
-            </a:ext>
-          </a:extLst>
-        </p:cNvPr>
-        <p:cNvGrpSpPr/>
-        <p:nvPr/>
-      </p:nvGrpSpPr>
-      <p:grpSpPr>
-        <a:xfrm>
-          <a:off x="0" y="0"/>
-          <a:ext cx="0" cy="0"/>
-          <a:chOff x="0" y="0"/>
-          <a:chExt cx="0" cy="0"/>
-        </a:xfrm>
-      </p:grpSpPr>
-      <p:sp>
-        <p:nvSpPr>
-          <p:cNvPr id="9" name="TextBox 8">
-            <a:extLst>
-              <a:ext uri="{FF2B5EF4-FFF2-40B4-BE49-F238E27FC236}">
-                <a16:creationId xmlns:a16="http://schemas.microsoft.com/office/drawing/2014/main" id="{E018E7A2-ACBA-1394-8855-0E8750AA2C1F}"/>
-              </a:ext>
-            </a:extLst>
-          </p:cNvPr>
-          <p:cNvSpPr txBox="1"/>
-          <p:nvPr/>
-        </p:nvSpPr>
-        <p:spPr>
-          <a:xfrm>
-            <a:off x="477520" y="226536"/>
-            <a:ext cx="10292080" cy="4893647"/>
-          </a:xfrm>
-          <a:prstGeom prst="rect">
-            <a:avLst/>
-          </a:prstGeom>
-          <a:noFill/>
-        </p:spPr>
-        <p:txBody>
-          <a:bodyPr wrap="square">
-            <a:spAutoFit/>
-          </a:bodyPr>
-          <a:lstStyle/>
-          <a:p>
-            <a:r>
-              <a:rPr lang="en-US" sz="2400" b="1" dirty="0">
-                <a:solidFill>
-                  <a:schemeClr val="accent6">
-                    <a:lumMod val="60000"/>
-                    <a:lumOff val="40000"/>
-                  </a:schemeClr>
-                </a:solidFill>
-              </a:rPr>
-              <a:t>Memory in Agents: How AI Remembers</a:t>
-            </a:r>
-          </a:p>
-          <a:p>
-            <a:endParaRPr lang="en-US" sz="2400" b="1" dirty="0">
-              <a:solidFill>
-                <a:schemeClr val="accent6">
-                  <a:lumMod val="60000"/>
-                  <a:lumOff val="40000"/>
-                </a:schemeClr>
-              </a:solidFill>
-            </a:endParaRPr>
-          </a:p>
-          <a:p>
-            <a:r>
-              <a:rPr lang="en-US" sz="2400" i="1" dirty="0">
-                <a:solidFill>
-                  <a:schemeClr val="accent6">
-                    <a:lumMod val="60000"/>
-                    <a:lumOff val="40000"/>
-                  </a:schemeClr>
-                </a:solidFill>
-              </a:rPr>
-              <a:t>"You walk into your bank. </a:t>
-            </a:r>
-          </a:p>
-          <a:p>
-            <a:endParaRPr lang="en-US" sz="2400" i="1" dirty="0">
-              <a:solidFill>
-                <a:schemeClr val="accent6">
-                  <a:lumMod val="60000"/>
-                  <a:lumOff val="40000"/>
-                </a:schemeClr>
-              </a:solidFill>
-            </a:endParaRPr>
-          </a:p>
-          <a:p>
-            <a:r>
-              <a:rPr lang="en-US" sz="2400" i="1" dirty="0">
-                <a:solidFill>
-                  <a:schemeClr val="accent6">
-                    <a:lumMod val="60000"/>
-                    <a:lumOff val="40000"/>
-                  </a:schemeClr>
-                </a:solidFill>
-              </a:rPr>
-              <a:t>The relationship manager recognizes you, remembers your loan application from three months ago, knows you prefer WhatsApp over email, and recalls that you asked about NPS last time. He remembers you.</a:t>
-            </a:r>
-          </a:p>
-          <a:p>
-            <a:endParaRPr lang="en-US" sz="2400" i="1" dirty="0">
-              <a:solidFill>
-                <a:schemeClr val="accent6">
-                  <a:lumMod val="60000"/>
-                  <a:lumOff val="40000"/>
-                </a:schemeClr>
-              </a:solidFill>
-            </a:endParaRPr>
-          </a:p>
-          <a:p>
-            <a:r>
-              <a:rPr lang="en-US" sz="2400" i="1" dirty="0">
-                <a:solidFill>
-                  <a:schemeClr val="accent6">
-                    <a:lumMod val="60000"/>
-                    <a:lumOff val="40000"/>
-                  </a:schemeClr>
-                </a:solidFill>
-              </a:rPr>
-              <a:t>Now imagine if every time you visited, they had no memory of you at all — </a:t>
-            </a:r>
-          </a:p>
-          <a:p>
-            <a:pPr marL="342900" indent="-342900">
-              <a:buFont typeface="Arial" panose="020B0604020202020204" pitchFamily="34" charset="0"/>
-              <a:buChar char="•"/>
-            </a:pPr>
-            <a:r>
-              <a:rPr lang="en-US" sz="2400" i="1" dirty="0">
-                <a:solidFill>
-                  <a:schemeClr val="accent6">
-                    <a:lumMod val="60000"/>
-                    <a:lumOff val="40000"/>
-                  </a:schemeClr>
-                </a:solidFill>
-              </a:rPr>
-              <a:t>you'd have to re-introduce yourself, </a:t>
-            </a:r>
-          </a:p>
-          <a:p>
-            <a:pPr marL="342900" indent="-342900">
-              <a:buFont typeface="Arial" panose="020B0604020202020204" pitchFamily="34" charset="0"/>
-              <a:buChar char="•"/>
-            </a:pPr>
-            <a:r>
-              <a:rPr lang="en-US" sz="2400" i="1" dirty="0">
-                <a:solidFill>
-                  <a:schemeClr val="accent6">
-                    <a:lumMod val="60000"/>
-                    <a:lumOff val="40000"/>
-                  </a:schemeClr>
-                </a:solidFill>
-              </a:rPr>
-              <a:t>re-explain your situation, </a:t>
-            </a:r>
-          </a:p>
-          <a:p>
-            <a:pPr marL="342900" indent="-342900">
-              <a:buFont typeface="Arial" panose="020B0604020202020204" pitchFamily="34" charset="0"/>
-              <a:buChar char="•"/>
-            </a:pPr>
-            <a:r>
-              <a:rPr lang="en-US" sz="2400" i="1" dirty="0">
-                <a:solidFill>
-                  <a:schemeClr val="accent6">
-                    <a:lumMod val="60000"/>
-                    <a:lumOff val="40000"/>
-                  </a:schemeClr>
-                </a:solidFill>
-              </a:rPr>
-              <a:t>re-state your preferences. </a:t>
-            </a:r>
-          </a:p>
-          <a:p>
-            <a:r>
-              <a:rPr lang="en-US" sz="2400" i="1" dirty="0">
-                <a:solidFill>
-                  <a:schemeClr val="accent6">
-                    <a:lumMod val="60000"/>
-                    <a:lumOff val="40000"/>
-                  </a:schemeClr>
-                </a:solidFill>
-              </a:rPr>
-              <a:t>That's what a memoryless AI does to every user, every session."</a:t>
-            </a:r>
-            <a:endParaRPr lang="en-US" sz="2400" dirty="0">
-              <a:solidFill>
-                <a:schemeClr val="accent6">
-                  <a:lumMod val="60000"/>
-                  <a:lumOff val="40000"/>
-                </a:schemeClr>
-              </a:solidFill>
-            </a:endParaRPr>
-          </a:p>
-        </p:txBody>
-      </p:sp>
-    </p:spTree>
-    <p:extLst>
-      <p:ext uri="{BB962C8B-B14F-4D97-AF65-F5344CB8AC3E}">
-        <p14:creationId xmlns:p14="http://schemas.microsoft.com/office/powerpoint/2010/main" val="74278320"/>
-      </p:ext>
-    </p:extLst>
-  </p:cSld>
-  <p:clrMapOvr>
-    <a:masterClrMapping/>
-  </p:clrMapOvr>
-</p:sld>
-</file>
-
-<file path=ppt/slides/slide3.xml><?xml version="1.0" encoding="utf-8"?>
-<p:sld xmlns:a="http://schemas.openxmlformats.org/drawingml/2006/main" xmlns:r="http://schemas.openxmlformats.org/officeDocument/2006/relationships" xmlns:p="http://schemas.openxmlformats.org/presentationml/2006/main">
-  <p:cSld>
-    <p:spTree>
-      <p:nvGrpSpPr>
-        <p:cNvPr id="1" name=""/>
-        <p:cNvGrpSpPr/>
-        <p:nvPr/>
-      </p:nvGrpSpPr>
-      <p:grpSpPr>
-        <a:xfrm>
-          <a:off x="0" y="0"/>
-          <a:ext cx="0" cy="0"/>
-          <a:chOff x="0" y="0"/>
-          <a:chExt cx="0" cy="0"/>
-        </a:xfrm>
-      </p:grpSpPr>
-      <p:sp>
-        <p:nvSpPr>
-          <p:cNvPr id="5" name="TextBox 4">
-            <a:extLst>
-              <a:ext uri="{FF2B5EF4-FFF2-40B4-BE49-F238E27FC236}">
-                <a16:creationId xmlns:a16="http://schemas.microsoft.com/office/drawing/2014/main" id="{1D9C4AF6-237A-6F4C-2F60-DE91B153E39D}"/>
-              </a:ext>
-            </a:extLst>
-          </p:cNvPr>
-          <p:cNvSpPr txBox="1"/>
-          <p:nvPr/>
-        </p:nvSpPr>
-        <p:spPr>
-          <a:xfrm>
-            <a:off x="100584" y="304628"/>
-            <a:ext cx="8577072" cy="6001643"/>
-          </a:xfrm>
-          <a:prstGeom prst="rect">
-            <a:avLst/>
-          </a:prstGeom>
-          <a:noFill/>
-        </p:spPr>
-        <p:txBody>
-          <a:bodyPr wrap="square">
-            <a:spAutoFit/>
-          </a:bodyPr>
-          <a:lstStyle/>
-          <a:p>
-            <a:pPr>
-              <a:buNone/>
-            </a:pPr>
-            <a:r>
-              <a:rPr lang="en-US" sz="2400" b="1" dirty="0">
-                <a:solidFill>
-                  <a:schemeClr val="accent6">
-                    <a:lumMod val="60000"/>
-                    <a:lumOff val="40000"/>
-                  </a:schemeClr>
-                </a:solidFill>
-              </a:rPr>
-              <a:t>Short-Term Memory: The Context Window</a:t>
-            </a:r>
-          </a:p>
-          <a:p>
-            <a:pPr>
-              <a:buNone/>
-            </a:pPr>
-            <a:endParaRPr lang="en-US" sz="2400" b="1" dirty="0">
-              <a:solidFill>
-                <a:schemeClr val="accent6">
-                  <a:lumMod val="60000"/>
-                  <a:lumOff val="40000"/>
-                </a:schemeClr>
-              </a:solidFill>
-            </a:endParaRPr>
-          </a:p>
-          <a:p>
-            <a:pPr>
-              <a:buNone/>
-            </a:pPr>
-            <a:r>
-              <a:rPr lang="en-US" sz="2400" dirty="0">
-                <a:solidFill>
-                  <a:schemeClr val="accent6">
-                    <a:lumMod val="60000"/>
-                    <a:lumOff val="40000"/>
-                  </a:schemeClr>
-                </a:solidFill>
-              </a:rPr>
-              <a:t>The context window is the agent's working desk. Everything on the desk right now — the conversation so far, documents you've handed it, tool results, instructions — that's the context. The model can see and use all of it simultaneously.</a:t>
-            </a:r>
-          </a:p>
-          <a:p>
-            <a:pPr>
-              <a:buNone/>
-            </a:pPr>
-            <a:endParaRPr lang="en-US" sz="2400" dirty="0">
-              <a:solidFill>
-                <a:schemeClr val="accent6">
-                  <a:lumMod val="60000"/>
-                  <a:lumOff val="40000"/>
-                </a:schemeClr>
-              </a:solidFill>
-            </a:endParaRPr>
-          </a:p>
-          <a:p>
-            <a:pPr>
-              <a:buNone/>
-            </a:pPr>
-            <a:r>
-              <a:rPr lang="en-US" sz="2400" dirty="0">
-                <a:solidFill>
-                  <a:schemeClr val="accent6">
-                    <a:lumMod val="60000"/>
-                    <a:lumOff val="40000"/>
-                  </a:schemeClr>
-                </a:solidFill>
-              </a:rPr>
-              <a:t>The critical constraint is size. Context windows are measured in tokens (roughly 0.75 words per token).  You have only finite size in  context window</a:t>
-            </a:r>
-          </a:p>
-          <a:p>
-            <a:pPr>
-              <a:buNone/>
-            </a:pPr>
-            <a:endParaRPr lang="en-US" sz="2400" dirty="0">
-              <a:solidFill>
-                <a:schemeClr val="accent6">
-                  <a:lumMod val="60000"/>
-                  <a:lumOff val="40000"/>
-                </a:schemeClr>
-              </a:solidFill>
-            </a:endParaRPr>
-          </a:p>
-          <a:p>
-            <a:pPr>
-              <a:buNone/>
-            </a:pPr>
-            <a:r>
-              <a:rPr lang="en-US" sz="2400" dirty="0">
-                <a:solidFill>
-                  <a:schemeClr val="accent6">
-                    <a:lumMod val="60000"/>
-                    <a:lumOff val="40000"/>
-                  </a:schemeClr>
-                </a:solidFill>
-              </a:rPr>
-              <a:t>This creates a real engineering problem: </a:t>
-            </a:r>
-          </a:p>
-          <a:p>
-            <a:pPr>
-              <a:buNone/>
-            </a:pPr>
-            <a:r>
-              <a:rPr lang="en-US" sz="2400" i="1" dirty="0">
-                <a:solidFill>
-                  <a:schemeClr val="accent6">
-                    <a:lumMod val="60000"/>
-                    <a:lumOff val="40000"/>
-                  </a:schemeClr>
-                </a:solidFill>
-              </a:rPr>
-              <a:t>what do you keep on the desk, and what do you store elsewhere?</a:t>
-            </a:r>
-            <a:r>
-              <a:rPr lang="en-US" sz="2400" dirty="0">
-                <a:solidFill>
-                  <a:schemeClr val="accent6">
-                    <a:lumMod val="60000"/>
-                    <a:lumOff val="40000"/>
-                  </a:schemeClr>
-                </a:solidFill>
-              </a:rPr>
-              <a:t> </a:t>
-            </a:r>
-          </a:p>
-          <a:p>
-            <a:pPr>
-              <a:buNone/>
-            </a:pPr>
-            <a:r>
-              <a:rPr lang="en-US" sz="2400" dirty="0">
-                <a:solidFill>
-                  <a:schemeClr val="accent6">
-                    <a:lumMod val="60000"/>
-                    <a:lumOff val="40000"/>
-                  </a:schemeClr>
-                </a:solidFill>
-              </a:rPr>
-              <a:t>Agents solve this with a technique called </a:t>
-            </a:r>
-            <a:r>
-              <a:rPr lang="en-US" sz="2400" b="1" dirty="0">
-                <a:solidFill>
-                  <a:schemeClr val="accent6">
-                    <a:lumMod val="60000"/>
-                    <a:lumOff val="40000"/>
-                  </a:schemeClr>
-                </a:solidFill>
-              </a:rPr>
-              <a:t>memory summarization</a:t>
-            </a:r>
-            <a:r>
-              <a:rPr lang="en-US" sz="2400" dirty="0">
-                <a:solidFill>
-                  <a:schemeClr val="accent6">
-                    <a:lumMod val="60000"/>
-                    <a:lumOff val="40000"/>
-                  </a:schemeClr>
-                </a:solidFill>
-              </a:rPr>
-              <a:t> — periodically compressing older conversation into a summary, keeping the gist without keeping every word. </a:t>
-            </a:r>
-          </a:p>
-        </p:txBody>
-      </p:sp>
-    </p:spTree>
-    <p:extLst>
-      <p:ext uri="{BB962C8B-B14F-4D97-AF65-F5344CB8AC3E}">
-        <p14:creationId xmlns:p14="http://schemas.microsoft.com/office/powerpoint/2010/main" val="130278013"/>
-      </p:ext>
-    </p:extLst>
-  </p:cSld>
-  <p:clrMapOvr>
-    <a:masterClrMapping/>
-  </p:clrMapOvr>
-</p:sld>
-</file>
-
-<file path=ppt/slides/slide4.xml><?xml version="1.0" encoding="utf-8"?>
-<p:sld xmlns:a="http://schemas.openxmlformats.org/drawingml/2006/main" xmlns:r="http://schemas.openxmlformats.org/officeDocument/2006/relationships" xmlns:p="http://schemas.openxmlformats.org/presentationml/2006/main">
-  <p:cSld>
-    <p:spTree>
-      <p:nvGrpSpPr>
-        <p:cNvPr id="1" name="">
-          <a:extLst>
-            <a:ext uri="{FF2B5EF4-FFF2-40B4-BE49-F238E27FC236}">
-              <a16:creationId xmlns:a16="http://schemas.microsoft.com/office/drawing/2014/main" id="{D2739DFC-D025-2ECD-48D7-4BED0CD98DCB}"/>
-            </a:ext>
-          </a:extLst>
-        </p:cNvPr>
-        <p:cNvGrpSpPr/>
-        <p:nvPr/>
-      </p:nvGrpSpPr>
-      <p:grpSpPr>
-        <a:xfrm>
-          <a:off x="0" y="0"/>
-          <a:ext cx="0" cy="0"/>
-          <a:chOff x="0" y="0"/>
-          <a:chExt cx="0" cy="0"/>
-        </a:xfrm>
-      </p:grpSpPr>
-      <p:sp>
-        <p:nvSpPr>
-          <p:cNvPr id="5" name="TextBox 4">
-            <a:extLst>
-              <a:ext uri="{FF2B5EF4-FFF2-40B4-BE49-F238E27FC236}">
-                <a16:creationId xmlns:a16="http://schemas.microsoft.com/office/drawing/2014/main" id="{C6906320-5AB1-0C3D-E59E-7B20B3E50A54}"/>
-              </a:ext>
-            </a:extLst>
-          </p:cNvPr>
-          <p:cNvSpPr txBox="1"/>
-          <p:nvPr/>
-        </p:nvSpPr>
-        <p:spPr>
-          <a:xfrm>
-            <a:off x="100584" y="304628"/>
-            <a:ext cx="10607040" cy="5632311"/>
-          </a:xfrm>
-          <a:prstGeom prst="rect">
-            <a:avLst/>
-          </a:prstGeom>
-          <a:noFill/>
-        </p:spPr>
-        <p:txBody>
-          <a:bodyPr wrap="square">
-            <a:spAutoFit/>
-          </a:bodyPr>
-          <a:lstStyle/>
-          <a:p>
-            <a:r>
-              <a:rPr lang="en-US" sz="2400" b="1" dirty="0">
-                <a:solidFill>
-                  <a:schemeClr val="accent6">
-                    <a:lumMod val="60000"/>
-                    <a:lumOff val="40000"/>
-                  </a:schemeClr>
-                </a:solidFill>
-              </a:rPr>
-              <a:t>Long-Term Memory: The External Store</a:t>
-            </a:r>
-          </a:p>
-          <a:p>
-            <a:endParaRPr lang="en-US" sz="2400" b="1" dirty="0">
-              <a:solidFill>
-                <a:schemeClr val="accent6">
-                  <a:lumMod val="60000"/>
-                  <a:lumOff val="40000"/>
-                </a:schemeClr>
-              </a:solidFill>
-            </a:endParaRPr>
-          </a:p>
-          <a:p>
-            <a:r>
-              <a:rPr lang="en-US" sz="2400" dirty="0">
-                <a:solidFill>
-                  <a:schemeClr val="accent6">
-                    <a:lumMod val="60000"/>
-                    <a:lumOff val="40000"/>
-                  </a:schemeClr>
-                </a:solidFill>
-              </a:rPr>
-              <a:t>Long-term memory is everything outside the context window — persisted in a database, retrievable when needed, growing indefinitely. </a:t>
-            </a:r>
-          </a:p>
-          <a:p>
-            <a:endParaRPr lang="en-US" sz="2400" dirty="0">
-              <a:solidFill>
-                <a:schemeClr val="accent6">
-                  <a:lumMod val="60000"/>
-                  <a:lumOff val="40000"/>
-                </a:schemeClr>
-              </a:solidFill>
-            </a:endParaRPr>
-          </a:p>
-          <a:p>
-            <a:r>
-              <a:rPr lang="en-US" sz="2400" dirty="0">
-                <a:solidFill>
-                  <a:schemeClr val="accent6">
-                    <a:lumMod val="60000"/>
-                    <a:lumOff val="40000"/>
-                  </a:schemeClr>
-                </a:solidFill>
-              </a:rPr>
-              <a:t>When a new session starts, the agent doesn't load all of long-term memory into context (that would overflow it). Instead, it fetches only what's relevant to the current task.</a:t>
-            </a:r>
-          </a:p>
-          <a:p>
-            <a:endParaRPr lang="en-US" sz="2400" dirty="0">
-              <a:solidFill>
-                <a:schemeClr val="accent6">
-                  <a:lumMod val="60000"/>
-                  <a:lumOff val="40000"/>
-                </a:schemeClr>
-              </a:solidFill>
-            </a:endParaRPr>
-          </a:p>
-          <a:p>
-            <a:r>
-              <a:rPr lang="en-US" sz="2400" dirty="0">
-                <a:solidFill>
-                  <a:schemeClr val="accent6">
-                    <a:lumMod val="60000"/>
-                    <a:lumOff val="40000"/>
-                  </a:schemeClr>
-                </a:solidFill>
-              </a:rPr>
-              <a:t>The question is: how do you know what's relevant? </a:t>
-            </a:r>
-          </a:p>
-          <a:p>
-            <a:pPr marL="457200" indent="-457200">
-              <a:buFont typeface="+mj-lt"/>
-              <a:buAutoNum type="arabicPeriod"/>
-            </a:pPr>
-            <a:r>
-              <a:rPr lang="en-US" sz="2400" dirty="0">
-                <a:solidFill>
-                  <a:schemeClr val="accent6">
-                    <a:lumMod val="60000"/>
-                    <a:lumOff val="40000"/>
-                  </a:schemeClr>
-                </a:solidFill>
-              </a:rPr>
-              <a:t>For structured data — account numbers, transaction records, customer profiles — a standard SQL database query works fine. You search by ID or date, get back exact rows.</a:t>
-            </a:r>
-          </a:p>
-          <a:p>
-            <a:pPr marL="457200" indent="-457200">
-              <a:buFont typeface="+mj-lt"/>
-              <a:buAutoNum type="arabicPeriod"/>
-            </a:pPr>
-            <a:r>
-              <a:rPr lang="en-US" sz="2400" dirty="0">
-                <a:solidFill>
-                  <a:schemeClr val="accent6">
-                    <a:lumMod val="60000"/>
-                    <a:lumOff val="40000"/>
-                  </a:schemeClr>
-                </a:solidFill>
-              </a:rPr>
-              <a:t>For unstructured knowledge — past conversations, documents, notes, emails — exact-match SQL fails. You use vector databases.</a:t>
-            </a:r>
-          </a:p>
-        </p:txBody>
-      </p:sp>
-    </p:spTree>
-    <p:extLst>
-      <p:ext uri="{BB962C8B-B14F-4D97-AF65-F5344CB8AC3E}">
-        <p14:creationId xmlns:p14="http://schemas.microsoft.com/office/powerpoint/2010/main" val="2130995780"/>
-      </p:ext>
-    </p:extLst>
-  </p:cSld>
-  <p:clrMapOvr>
-    <a:masterClrMapping/>
-  </p:clrMapOvr>
-</p:sld>
-</file>
-
-<file path=ppt/slides/slide5.xml><?xml version="1.0" encoding="utf-8"?>
-<p:sld xmlns:a="http://schemas.openxmlformats.org/drawingml/2006/main" xmlns:r="http://schemas.openxmlformats.org/officeDocument/2006/relationships" xmlns:p="http://schemas.openxmlformats.org/presentationml/2006/main">
-  <p:cSld>
-    <p:spTree>
-      <p:nvGrpSpPr>
-        <p:cNvPr id="1" name="">
-          <a:extLst>
-            <a:ext uri="{FF2B5EF4-FFF2-40B4-BE49-F238E27FC236}">
-              <a16:creationId xmlns:a16="http://schemas.microsoft.com/office/drawing/2014/main" id="{CF63EF23-9000-16F3-86FD-5AF4808859FB}"/>
-            </a:ext>
-          </a:extLst>
-        </p:cNvPr>
-        <p:cNvGrpSpPr/>
-        <p:nvPr/>
-      </p:nvGrpSpPr>
-      <p:grpSpPr>
-        <a:xfrm>
-          <a:off x="0" y="0"/>
-          <a:ext cx="0" cy="0"/>
-          <a:chOff x="0" y="0"/>
-          <a:chExt cx="0" cy="0"/>
-        </a:xfrm>
-      </p:grpSpPr>
-      <p:sp>
-        <p:nvSpPr>
-          <p:cNvPr id="5" name="TextBox 4">
-            <a:extLst>
-              <a:ext uri="{FF2B5EF4-FFF2-40B4-BE49-F238E27FC236}">
-                <a16:creationId xmlns:a16="http://schemas.microsoft.com/office/drawing/2014/main" id="{5E0C9829-07E1-F63C-A3E4-21BDAFE6D898}"/>
-              </a:ext>
-            </a:extLst>
-          </p:cNvPr>
-          <p:cNvSpPr txBox="1"/>
-          <p:nvPr/>
-        </p:nvSpPr>
-        <p:spPr>
-          <a:xfrm>
-            <a:off x="100584" y="304628"/>
-            <a:ext cx="10607040" cy="1200329"/>
-          </a:xfrm>
-          <a:prstGeom prst="rect">
-            <a:avLst/>
-          </a:prstGeom>
-          <a:noFill/>
-        </p:spPr>
-        <p:txBody>
-          <a:bodyPr wrap="square">
-            <a:spAutoFit/>
-          </a:bodyPr>
-          <a:lstStyle/>
-          <a:p>
-            <a:r>
-              <a:rPr lang="en-US" sz="2400" b="1" dirty="0">
-                <a:solidFill>
-                  <a:schemeClr val="accent6">
-                    <a:lumMod val="60000"/>
-                    <a:lumOff val="40000"/>
-                  </a:schemeClr>
-                </a:solidFill>
-              </a:rPr>
-              <a:t>Best Official documentation:</a:t>
-            </a:r>
-          </a:p>
-          <a:p>
-            <a:br>
-              <a:rPr lang="en-US" sz="2400" b="1" dirty="0">
-                <a:solidFill>
-                  <a:schemeClr val="accent6">
-                    <a:lumMod val="60000"/>
-                    <a:lumOff val="40000"/>
-                  </a:schemeClr>
-                </a:solidFill>
-              </a:rPr>
-            </a:br>
-            <a:r>
-              <a:rPr lang="en-US" sz="2400" dirty="0">
-                <a:solidFill>
-                  <a:schemeClr val="accent6">
-                    <a:lumMod val="60000"/>
-                    <a:lumOff val="40000"/>
-                  </a:schemeClr>
-                </a:solidFill>
-              </a:rPr>
-              <a:t>https://docs.langchain.com/oss/python/concepts/memory</a:t>
-            </a:r>
-          </a:p>
-        </p:txBody>
-      </p:sp>
-    </p:spTree>
-    <p:extLst>
-      <p:ext uri="{BB962C8B-B14F-4D97-AF65-F5344CB8AC3E}">
-        <p14:creationId xmlns:p14="http://schemas.microsoft.com/office/powerpoint/2010/main" val="2784093989"/>
-      </p:ext>
-    </p:extLst>
-  </p:cSld>
-  <p:clrMapOvr>
-    <a:masterClrMapping/>
-  </p:clrMapOvr>
-</p:sld>
-</file>
-
-<file path=ppt/slides/slide6.xml><?xml version="1.0" encoding="utf-8"?>
-<p:sld xmlns:a="http://schemas.openxmlformats.org/drawingml/2006/main" xmlns:r="http://schemas.openxmlformats.org/officeDocument/2006/relationships" xmlns:p="http://schemas.openxmlformats.org/presentationml/2006/main">
-  <p:cSld>
-    <p:spTree>
-      <p:nvGrpSpPr>
-        <p:cNvPr id="1" name="">
-          <a:extLst>
-            <a:ext uri="{FF2B5EF4-FFF2-40B4-BE49-F238E27FC236}">
-              <a16:creationId xmlns:a16="http://schemas.microsoft.com/office/drawing/2014/main" id="{99424736-A728-E40F-4B08-F26E6CD1BEAC}"/>
-            </a:ext>
-          </a:extLst>
-        </p:cNvPr>
-        <p:cNvGrpSpPr/>
-        <p:nvPr/>
-      </p:nvGrpSpPr>
-      <p:grpSpPr>
-        <a:xfrm>
-          <a:off x="0" y="0"/>
-          <a:ext cx="0" cy="0"/>
-          <a:chOff x="0" y="0"/>
-          <a:chExt cx="0" cy="0"/>
-        </a:xfrm>
-      </p:grpSpPr>
-      <p:sp>
-        <p:nvSpPr>
-          <p:cNvPr id="4" name="TextBox 3">
-            <a:extLst>
-              <a:ext uri="{FF2B5EF4-FFF2-40B4-BE49-F238E27FC236}">
-                <a16:creationId xmlns:a16="http://schemas.microsoft.com/office/drawing/2014/main" id="{CE0FA625-50E0-A420-4B0D-D9864C7FAC66}"/>
-              </a:ext>
-            </a:extLst>
-          </p:cNvPr>
-          <p:cNvSpPr txBox="1"/>
-          <p:nvPr/>
-        </p:nvSpPr>
-        <p:spPr>
-          <a:xfrm>
-            <a:off x="100584" y="304628"/>
-            <a:ext cx="10607040" cy="5632311"/>
-          </a:xfrm>
-          <a:prstGeom prst="rect">
-            <a:avLst/>
-          </a:prstGeom>
-          <a:noFill/>
-        </p:spPr>
-        <p:txBody>
-          <a:bodyPr wrap="square">
-            <a:spAutoFit/>
-          </a:bodyPr>
-          <a:lstStyle/>
-          <a:p>
-            <a:r>
-              <a:rPr lang="en-US" sz="2400" b="1" dirty="0">
-                <a:solidFill>
-                  <a:schemeClr val="accent6">
-                    <a:lumMod val="60000"/>
-                    <a:lumOff val="40000"/>
-                  </a:schemeClr>
-                </a:solidFill>
-              </a:rPr>
-              <a:t>Discussion Prompt for Class</a:t>
-            </a:r>
-          </a:p>
-          <a:p>
-            <a:endParaRPr lang="en-US" sz="2400" b="1" dirty="0">
-              <a:solidFill>
-                <a:schemeClr val="accent6">
-                  <a:lumMod val="60000"/>
-                  <a:lumOff val="40000"/>
-                </a:schemeClr>
-              </a:solidFill>
-            </a:endParaRPr>
-          </a:p>
-          <a:p>
-            <a:r>
-              <a:rPr lang="en-US" sz="2400" i="1" dirty="0">
-                <a:solidFill>
-                  <a:schemeClr val="accent6">
-                    <a:lumMod val="60000"/>
-                    <a:lumOff val="40000"/>
-                  </a:schemeClr>
-                </a:solidFill>
-              </a:rPr>
-              <a:t>"A fintech agent remembers everything a customer has ever said —</a:t>
-            </a:r>
-          </a:p>
-          <a:p>
-            <a:r>
-              <a:rPr lang="en-US" sz="2400" i="1" dirty="0">
-                <a:solidFill>
-                  <a:schemeClr val="accent6">
-                    <a:lumMod val="60000"/>
-                    <a:lumOff val="40000"/>
-                  </a:schemeClr>
-                </a:solidFill>
-              </a:rPr>
-              <a:t> their financial worries, </a:t>
-            </a:r>
-          </a:p>
-          <a:p>
-            <a:r>
-              <a:rPr lang="en-US" sz="2400" i="1" dirty="0">
-                <a:solidFill>
-                  <a:schemeClr val="accent6">
-                    <a:lumMod val="60000"/>
-                    <a:lumOff val="40000"/>
-                  </a:schemeClr>
-                </a:solidFill>
-              </a:rPr>
-              <a:t>their family situation, </a:t>
-            </a:r>
-          </a:p>
-          <a:p>
-            <a:r>
-              <a:rPr lang="en-US" sz="2400" i="1" dirty="0">
-                <a:solidFill>
-                  <a:schemeClr val="accent6">
-                    <a:lumMod val="60000"/>
-                    <a:lumOff val="40000"/>
-                  </a:schemeClr>
-                </a:solidFill>
-              </a:rPr>
-              <a:t>their investment fears. </a:t>
-            </a:r>
-          </a:p>
-          <a:p>
-            <a:endParaRPr lang="en-US" sz="2400" i="1" dirty="0">
-              <a:solidFill>
-                <a:schemeClr val="accent6">
-                  <a:lumMod val="60000"/>
-                  <a:lumOff val="40000"/>
-                </a:schemeClr>
-              </a:solidFill>
-            </a:endParaRPr>
-          </a:p>
-          <a:p>
-            <a:r>
-              <a:rPr lang="en-US" sz="2400" i="1" dirty="0">
-                <a:solidFill>
-                  <a:schemeClr val="accent6">
-                    <a:lumMod val="60000"/>
-                    <a:lumOff val="40000"/>
-                  </a:schemeClr>
-                </a:solidFill>
-              </a:rPr>
-              <a:t>This makes it far more helpful. </a:t>
-            </a:r>
-          </a:p>
-          <a:p>
-            <a:r>
-              <a:rPr lang="en-US" sz="2400" i="1" dirty="0">
-                <a:solidFill>
-                  <a:schemeClr val="accent6">
-                    <a:lumMod val="60000"/>
-                    <a:lumOff val="40000"/>
-                  </a:schemeClr>
-                </a:solidFill>
-              </a:rPr>
-              <a:t>But it also means someone is storing a detailed psychological and financial profile of every customer. </a:t>
-            </a:r>
-          </a:p>
-          <a:p>
-            <a:endParaRPr lang="en-US" sz="2400" i="1" dirty="0">
-              <a:solidFill>
-                <a:schemeClr val="accent6">
-                  <a:lumMod val="60000"/>
-                  <a:lumOff val="40000"/>
-                </a:schemeClr>
-              </a:solidFill>
-            </a:endParaRPr>
-          </a:p>
-          <a:p>
-            <a:r>
-              <a:rPr lang="en-US" sz="2400" i="1" dirty="0">
-                <a:solidFill>
-                  <a:schemeClr val="accent6">
-                    <a:lumMod val="60000"/>
-                    <a:lumOff val="40000"/>
-                  </a:schemeClr>
-                </a:solidFill>
-              </a:rPr>
-              <a:t>Who owns that memory? </a:t>
-            </a:r>
-          </a:p>
-          <a:p>
-            <a:r>
-              <a:rPr lang="en-US" sz="2400" i="1" dirty="0">
-                <a:solidFill>
-                  <a:schemeClr val="accent6">
-                    <a:lumMod val="60000"/>
-                    <a:lumOff val="40000"/>
-                  </a:schemeClr>
-                </a:solidFill>
-              </a:rPr>
-              <a:t>Can the customer delete it? </a:t>
-            </a:r>
-          </a:p>
-          <a:p>
-            <a:r>
-              <a:rPr lang="en-US" sz="2400" i="1" dirty="0">
-                <a:solidFill>
-                  <a:schemeClr val="accent6">
-                    <a:lumMod val="60000"/>
-                    <a:lumOff val="40000"/>
-                  </a:schemeClr>
-                </a:solidFill>
-              </a:rPr>
-              <a:t>What if the bank is acquired? </a:t>
-            </a:r>
-          </a:p>
-          <a:p>
-            <a:r>
-              <a:rPr lang="en-US" sz="2400" i="1" dirty="0">
-                <a:solidFill>
-                  <a:schemeClr val="accent6">
-                    <a:lumMod val="60000"/>
-                    <a:lumOff val="40000"/>
-                  </a:schemeClr>
-                </a:solidFill>
-              </a:rPr>
-              <a:t>Should there be a 'right to be forgotten' for AI memory?"</a:t>
-            </a:r>
-            <a:endParaRPr lang="en-US" sz="2400" dirty="0">
-              <a:solidFill>
-                <a:schemeClr val="accent6">
-                  <a:lumMod val="60000"/>
-                  <a:lumOff val="40000"/>
-                </a:schemeClr>
-              </a:solidFill>
-            </a:endParaRPr>
-          </a:p>
-        </p:txBody>
-      </p:sp>
-    </p:spTree>
-    <p:extLst>
-      <p:ext uri="{BB962C8B-B14F-4D97-AF65-F5344CB8AC3E}">
-        <p14:creationId xmlns:p14="http://schemas.microsoft.com/office/powerpoint/2010/main" val="848120013"/>
-      </p:ext>
-    </p:extLst>
-  </p:cSld>
-  <p:clrMapOvr>
-    <a:masterClrMapping/>
-  </p:clrMapOvr>
-</p:sld>
-</file>
-
-<file path=ppt/slides/slide7.xml><?xml version="1.0" encoding="utf-8"?>
+<file path=ppt/slides/slide10.xml><?xml version="1.0" encoding="utf-8"?>
 <p:sld xmlns:a="http://schemas.openxmlformats.org/drawingml/2006/main" xmlns:r="http://schemas.openxmlformats.org/officeDocument/2006/relationships" xmlns:p="http://schemas.openxmlformats.org/presentationml/2006/main">
   <p:cSld>
     <p:spTree>
@@ -5082,7 +4111,7 @@
 </p:sld>
 </file>
 
-<file path=ppt/slides/slide8.xml><?xml version="1.0" encoding="utf-8"?>
+<file path=ppt/slides/slide11.xml><?xml version="1.0" encoding="utf-8"?>
 <p:sld xmlns:a="http://schemas.openxmlformats.org/drawingml/2006/main" xmlns:r="http://schemas.openxmlformats.org/officeDocument/2006/relationships" xmlns:p="http://schemas.openxmlformats.org/presentationml/2006/main">
   <p:cSld>
     <p:spTree>
@@ -5198,7 +4227,7 @@
 </p:sld>
 </file>
 
-<file path=ppt/slides/slide9.xml><?xml version="1.0" encoding="utf-8"?>
+<file path=ppt/slides/slide12.xml><?xml version="1.0" encoding="utf-8"?>
 <p:sld xmlns:a="http://schemas.openxmlformats.org/drawingml/2006/main" xmlns:r="http://schemas.openxmlformats.org/officeDocument/2006/relationships" xmlns:p="http://schemas.openxmlformats.org/presentationml/2006/main">
   <p:cSld>
     <p:spTree>
@@ -5225,6 +4254,2225 @@
     <p:extLst>
       <p:ext uri="{BB962C8B-B14F-4D97-AF65-F5344CB8AC3E}">
         <p14:creationId xmlns:p14="http://schemas.microsoft.com/office/powerpoint/2010/main" val="366625378"/>
+      </p:ext>
+    </p:extLst>
+  </p:cSld>
+  <p:clrMapOvr>
+    <a:masterClrMapping/>
+  </p:clrMapOvr>
+</p:sld>
+</file>
+
+<file path=ppt/slides/slide2.xml><?xml version="1.0" encoding="utf-8"?>
+<p:sld xmlns:a="http://schemas.openxmlformats.org/drawingml/2006/main" xmlns:r="http://schemas.openxmlformats.org/officeDocument/2006/relationships" xmlns:p="http://schemas.openxmlformats.org/presentationml/2006/main">
+  <p:cSld>
+    <p:spTree>
+      <p:nvGrpSpPr>
+        <p:cNvPr id="1" name="">
+          <a:extLst>
+            <a:ext uri="{FF2B5EF4-FFF2-40B4-BE49-F238E27FC236}">
+              <a16:creationId xmlns:a16="http://schemas.microsoft.com/office/drawing/2014/main" id="{529EBDA7-B44E-B824-B04A-1C6D1FB40ED7}"/>
+            </a:ext>
+          </a:extLst>
+        </p:cNvPr>
+        <p:cNvGrpSpPr/>
+        <p:nvPr/>
+      </p:nvGrpSpPr>
+      <p:grpSpPr>
+        <a:xfrm>
+          <a:off x="0" y="0"/>
+          <a:ext cx="0" cy="0"/>
+          <a:chOff x="0" y="0"/>
+          <a:chExt cx="0" cy="0"/>
+        </a:xfrm>
+      </p:grpSpPr>
+      <p:sp>
+        <p:nvSpPr>
+          <p:cNvPr id="9" name="TextBox 8">
+            <a:extLst>
+              <a:ext uri="{FF2B5EF4-FFF2-40B4-BE49-F238E27FC236}">
+                <a16:creationId xmlns:a16="http://schemas.microsoft.com/office/drawing/2014/main" id="{E018E7A2-ACBA-1394-8855-0E8750AA2C1F}"/>
+              </a:ext>
+            </a:extLst>
+          </p:cNvPr>
+          <p:cNvSpPr txBox="1"/>
+          <p:nvPr/>
+        </p:nvSpPr>
+        <p:spPr>
+          <a:xfrm>
+            <a:off x="477520" y="226536"/>
+            <a:ext cx="10292080" cy="1200329"/>
+          </a:xfrm>
+          <a:prstGeom prst="rect">
+            <a:avLst/>
+          </a:prstGeom>
+          <a:noFill/>
+        </p:spPr>
+        <p:txBody>
+          <a:bodyPr wrap="square">
+            <a:spAutoFit/>
+          </a:bodyPr>
+          <a:lstStyle/>
+          <a:p>
+            <a:r>
+              <a:rPr lang="en-US" sz="2400" b="1" dirty="0">
+                <a:solidFill>
+                  <a:schemeClr val="accent6">
+                    <a:lumMod val="60000"/>
+                    <a:lumOff val="40000"/>
+                  </a:schemeClr>
+                </a:solidFill>
+              </a:rPr>
+              <a:t>Memory in Agents: How AI Remembers</a:t>
+            </a:r>
+          </a:p>
+          <a:p>
+            <a:endParaRPr lang="en-US" sz="2400" b="1" dirty="0">
+              <a:solidFill>
+                <a:schemeClr val="accent6">
+                  <a:lumMod val="60000"/>
+                  <a:lumOff val="40000"/>
+                </a:schemeClr>
+              </a:solidFill>
+            </a:endParaRPr>
+          </a:p>
+          <a:p>
+            <a:r>
+              <a:rPr lang="en-US" sz="2400" i="1" dirty="0">
+                <a:solidFill>
+                  <a:schemeClr val="accent6">
+                    <a:lumMod val="60000"/>
+                    <a:lumOff val="40000"/>
+                  </a:schemeClr>
+                </a:solidFill>
+              </a:rPr>
+              <a:t>“There are 2 types of memory – </a:t>
+            </a:r>
+            <a:r>
+              <a:rPr lang="en-US" sz="2400" b="1" i="1" dirty="0">
+                <a:solidFill>
+                  <a:schemeClr val="accent6">
+                    <a:lumMod val="60000"/>
+                    <a:lumOff val="40000"/>
+                  </a:schemeClr>
+                </a:solidFill>
+              </a:rPr>
+              <a:t>Short Term </a:t>
+            </a:r>
+            <a:r>
+              <a:rPr lang="en-US" sz="2400" i="1" dirty="0">
+                <a:solidFill>
+                  <a:schemeClr val="accent6">
+                    <a:lumMod val="60000"/>
+                    <a:lumOff val="40000"/>
+                  </a:schemeClr>
+                </a:solidFill>
+              </a:rPr>
+              <a:t>and </a:t>
+            </a:r>
+            <a:r>
+              <a:rPr lang="en-US" sz="2400" b="1" i="1" dirty="0">
+                <a:solidFill>
+                  <a:schemeClr val="accent6">
+                    <a:lumMod val="60000"/>
+                    <a:lumOff val="40000"/>
+                  </a:schemeClr>
+                </a:solidFill>
+              </a:rPr>
+              <a:t>Long Term</a:t>
+            </a:r>
+            <a:r>
+              <a:rPr lang="en-US" sz="2400" i="1" dirty="0">
+                <a:solidFill>
+                  <a:schemeClr val="accent6">
+                    <a:lumMod val="60000"/>
+                    <a:lumOff val="40000"/>
+                  </a:schemeClr>
+                </a:solidFill>
+              </a:rPr>
+              <a:t>"</a:t>
+            </a:r>
+            <a:endParaRPr lang="en-US" sz="2400" dirty="0">
+              <a:solidFill>
+                <a:schemeClr val="accent6">
+                  <a:lumMod val="60000"/>
+                  <a:lumOff val="40000"/>
+                </a:schemeClr>
+              </a:solidFill>
+            </a:endParaRPr>
+          </a:p>
+        </p:txBody>
+      </p:sp>
+      <p:sp>
+        <p:nvSpPr>
+          <p:cNvPr id="3" name="TextBox 2">
+            <a:extLst>
+              <a:ext uri="{FF2B5EF4-FFF2-40B4-BE49-F238E27FC236}">
+                <a16:creationId xmlns:a16="http://schemas.microsoft.com/office/drawing/2014/main" id="{5D788594-6224-5091-5DB3-6FA6D635C4EF}"/>
+              </a:ext>
+            </a:extLst>
+          </p:cNvPr>
+          <p:cNvSpPr txBox="1"/>
+          <p:nvPr/>
+        </p:nvSpPr>
+        <p:spPr>
+          <a:xfrm>
+            <a:off x="238506" y="1524137"/>
+            <a:ext cx="3720846" cy="1200329"/>
+          </a:xfrm>
+          <a:prstGeom prst="rect">
+            <a:avLst/>
+          </a:prstGeom>
+          <a:noFill/>
+        </p:spPr>
+        <p:txBody>
+          <a:bodyPr wrap="square">
+            <a:spAutoFit/>
+          </a:bodyPr>
+          <a:lstStyle/>
+          <a:p>
+            <a:r>
+              <a:rPr lang="en-IN" sz="2400" b="1" u="sng" dirty="0">
+                <a:solidFill>
+                  <a:schemeClr val="accent6">
+                    <a:lumMod val="60000"/>
+                    <a:lumOff val="40000"/>
+                  </a:schemeClr>
+                </a:solidFill>
+              </a:rPr>
+              <a:t>Short-term memory</a:t>
+            </a:r>
+          </a:p>
+          <a:p>
+            <a:r>
+              <a:rPr lang="en-IN" sz="2400" dirty="0">
+                <a:solidFill>
+                  <a:schemeClr val="accent6">
+                    <a:lumMod val="60000"/>
+                    <a:lumOff val="40000"/>
+                  </a:schemeClr>
+                </a:solidFill>
+              </a:rPr>
+              <a:t>Stores what is happening in the </a:t>
+            </a:r>
+            <a:r>
+              <a:rPr lang="en-IN" sz="2400" b="1" dirty="0">
+                <a:solidFill>
+                  <a:schemeClr val="accent6">
+                    <a:lumMod val="60000"/>
+                    <a:lumOff val="40000"/>
+                  </a:schemeClr>
+                </a:solidFill>
+              </a:rPr>
+              <a:t>current conversation</a:t>
+            </a:r>
+          </a:p>
+        </p:txBody>
+      </p:sp>
+      <p:sp>
+        <p:nvSpPr>
+          <p:cNvPr id="5" name="TextBox 4">
+            <a:extLst>
+              <a:ext uri="{FF2B5EF4-FFF2-40B4-BE49-F238E27FC236}">
+                <a16:creationId xmlns:a16="http://schemas.microsoft.com/office/drawing/2014/main" id="{C4AB72AD-380B-8E4F-51BF-FC99F51FFB2A}"/>
+              </a:ext>
+            </a:extLst>
+          </p:cNvPr>
+          <p:cNvSpPr txBox="1"/>
+          <p:nvPr/>
+        </p:nvSpPr>
+        <p:spPr>
+          <a:xfrm>
+            <a:off x="5788152" y="1524137"/>
+            <a:ext cx="5120640" cy="1569660"/>
+          </a:xfrm>
+          <a:prstGeom prst="rect">
+            <a:avLst/>
+          </a:prstGeom>
+          <a:noFill/>
+        </p:spPr>
+        <p:txBody>
+          <a:bodyPr wrap="square">
+            <a:spAutoFit/>
+          </a:bodyPr>
+          <a:lstStyle/>
+          <a:p>
+            <a:r>
+              <a:rPr lang="en-IN" sz="2400" b="1" u="sng" dirty="0">
+                <a:solidFill>
+                  <a:schemeClr val="accent6">
+                    <a:lumMod val="60000"/>
+                    <a:lumOff val="40000"/>
+                  </a:schemeClr>
+                </a:solidFill>
+              </a:rPr>
+              <a:t>Long-term memory</a:t>
+            </a:r>
+          </a:p>
+          <a:p>
+            <a:r>
+              <a:rPr lang="en-IN" sz="2400" dirty="0">
+                <a:solidFill>
+                  <a:schemeClr val="accent6">
+                    <a:lumMod val="60000"/>
+                    <a:lumOff val="40000"/>
+                  </a:schemeClr>
+                </a:solidFill>
+              </a:rPr>
+              <a:t>Stores what should be remembered about the user/application across </a:t>
+            </a:r>
+            <a:r>
+              <a:rPr lang="en-IN" sz="2400" b="1" dirty="0">
+                <a:solidFill>
+                  <a:schemeClr val="accent6">
+                    <a:lumMod val="60000"/>
+                    <a:lumOff val="40000"/>
+                  </a:schemeClr>
+                </a:solidFill>
+              </a:rPr>
+              <a:t>many conversations.</a:t>
+            </a:r>
+          </a:p>
+        </p:txBody>
+      </p:sp>
+    </p:spTree>
+    <p:extLst>
+      <p:ext uri="{BB962C8B-B14F-4D97-AF65-F5344CB8AC3E}">
+        <p14:creationId xmlns:p14="http://schemas.microsoft.com/office/powerpoint/2010/main" val="74278320"/>
+      </p:ext>
+    </p:extLst>
+  </p:cSld>
+  <p:clrMapOvr>
+    <a:masterClrMapping/>
+  </p:clrMapOvr>
+</p:sld>
+</file>
+
+<file path=ppt/slides/slide3.xml><?xml version="1.0" encoding="utf-8"?>
+<p:sld xmlns:a="http://schemas.openxmlformats.org/drawingml/2006/main" xmlns:r="http://schemas.openxmlformats.org/officeDocument/2006/relationships" xmlns:p="http://schemas.openxmlformats.org/presentationml/2006/main">
+  <p:cSld>
+    <p:spTree>
+      <p:nvGrpSpPr>
+        <p:cNvPr id="1" name="">
+          <a:extLst>
+            <a:ext uri="{FF2B5EF4-FFF2-40B4-BE49-F238E27FC236}">
+              <a16:creationId xmlns:a16="http://schemas.microsoft.com/office/drawing/2014/main" id="{359B8D19-7F19-B111-A897-1ADA804E7E82}"/>
+            </a:ext>
+          </a:extLst>
+        </p:cNvPr>
+        <p:cNvGrpSpPr/>
+        <p:nvPr/>
+      </p:nvGrpSpPr>
+      <p:grpSpPr>
+        <a:xfrm>
+          <a:off x="0" y="0"/>
+          <a:ext cx="0" cy="0"/>
+          <a:chOff x="0" y="0"/>
+          <a:chExt cx="0" cy="0"/>
+        </a:xfrm>
+      </p:grpSpPr>
+      <p:sp>
+        <p:nvSpPr>
+          <p:cNvPr id="3" name="TextBox 2">
+            <a:extLst>
+              <a:ext uri="{FF2B5EF4-FFF2-40B4-BE49-F238E27FC236}">
+                <a16:creationId xmlns:a16="http://schemas.microsoft.com/office/drawing/2014/main" id="{27BA7BC2-7892-4792-CE33-E9498A4C3975}"/>
+              </a:ext>
+            </a:extLst>
+          </p:cNvPr>
+          <p:cNvSpPr txBox="1"/>
+          <p:nvPr/>
+        </p:nvSpPr>
+        <p:spPr>
+          <a:xfrm>
+            <a:off x="3192018" y="185308"/>
+            <a:ext cx="3720846" cy="461665"/>
+          </a:xfrm>
+          <a:prstGeom prst="rect">
+            <a:avLst/>
+          </a:prstGeom>
+          <a:noFill/>
+        </p:spPr>
+        <p:txBody>
+          <a:bodyPr wrap="square">
+            <a:spAutoFit/>
+          </a:bodyPr>
+          <a:lstStyle/>
+          <a:p>
+            <a:r>
+              <a:rPr lang="en-IN" sz="2400" b="1" u="sng" dirty="0">
+                <a:solidFill>
+                  <a:schemeClr val="accent6">
+                    <a:lumMod val="60000"/>
+                    <a:lumOff val="40000"/>
+                  </a:schemeClr>
+                </a:solidFill>
+              </a:rPr>
+              <a:t>Short-term memory</a:t>
+            </a:r>
+          </a:p>
+        </p:txBody>
+      </p:sp>
+      <p:sp>
+        <p:nvSpPr>
+          <p:cNvPr id="7" name="TextBox 6">
+            <a:extLst>
+              <a:ext uri="{FF2B5EF4-FFF2-40B4-BE49-F238E27FC236}">
+                <a16:creationId xmlns:a16="http://schemas.microsoft.com/office/drawing/2014/main" id="{4F853F30-B109-CE52-A6D2-EF895D1FA1A6}"/>
+              </a:ext>
+            </a:extLst>
+          </p:cNvPr>
+          <p:cNvSpPr txBox="1"/>
+          <p:nvPr/>
+        </p:nvSpPr>
+        <p:spPr>
+          <a:xfrm>
+            <a:off x="233172" y="1898827"/>
+            <a:ext cx="3890772" cy="3170099"/>
+          </a:xfrm>
+          <a:prstGeom prst="rect">
+            <a:avLst/>
+          </a:prstGeom>
+          <a:noFill/>
+        </p:spPr>
+        <p:txBody>
+          <a:bodyPr wrap="square">
+            <a:spAutoFit/>
+          </a:bodyPr>
+          <a:lstStyle/>
+          <a:p>
+            <a:r>
+              <a:rPr lang="en-IN" sz="2000" b="1" u="sng" dirty="0">
+                <a:solidFill>
+                  <a:schemeClr val="accent6">
+                    <a:lumMod val="60000"/>
+                    <a:lumOff val="40000"/>
+                  </a:schemeClr>
+                </a:solidFill>
+              </a:rPr>
+              <a:t>Example 1:</a:t>
+            </a:r>
+          </a:p>
+          <a:p>
+            <a:endParaRPr lang="en-IN" sz="2000" b="1" u="sng" dirty="0">
+              <a:solidFill>
+                <a:schemeClr val="accent6">
+                  <a:lumMod val="60000"/>
+                  <a:lumOff val="40000"/>
+                </a:schemeClr>
+              </a:solidFill>
+            </a:endParaRPr>
+          </a:p>
+          <a:p>
+            <a:r>
+              <a:rPr lang="en-IN" sz="2000" b="1" u="sng" dirty="0">
+                <a:solidFill>
+                  <a:schemeClr val="accent6">
+                    <a:lumMod val="60000"/>
+                    <a:lumOff val="40000"/>
+                  </a:schemeClr>
+                </a:solidFill>
+              </a:rPr>
+              <a:t>User:</a:t>
+            </a:r>
+            <a:r>
+              <a:rPr lang="en-IN" sz="2000" b="1" dirty="0">
+                <a:solidFill>
+                  <a:schemeClr val="accent6">
+                    <a:lumMod val="60000"/>
+                    <a:lumOff val="40000"/>
+                  </a:schemeClr>
+                </a:solidFill>
+              </a:rPr>
+              <a:t> </a:t>
+            </a:r>
+            <a:r>
+              <a:rPr lang="en-IN" sz="2000" dirty="0">
+                <a:solidFill>
+                  <a:schemeClr val="accent6">
+                    <a:lumMod val="60000"/>
+                    <a:lumOff val="40000"/>
+                  </a:schemeClr>
+                </a:solidFill>
+              </a:rPr>
+              <a:t>My name is Ash. </a:t>
+            </a:r>
+          </a:p>
+          <a:p>
+            <a:r>
+              <a:rPr lang="en-IN" sz="2000" b="1" u="sng" dirty="0">
+                <a:solidFill>
+                  <a:schemeClr val="accent6">
+                    <a:lumMod val="60000"/>
+                    <a:lumOff val="40000"/>
+                  </a:schemeClr>
+                </a:solidFill>
+              </a:rPr>
+              <a:t>Agent:</a:t>
+            </a:r>
+            <a:r>
+              <a:rPr lang="en-IN" sz="2000" dirty="0">
+                <a:solidFill>
+                  <a:schemeClr val="accent6">
+                    <a:lumMod val="60000"/>
+                    <a:lumOff val="40000"/>
+                  </a:schemeClr>
+                </a:solidFill>
+              </a:rPr>
+              <a:t> Nice to meet you, Ash.</a:t>
+            </a:r>
+          </a:p>
+          <a:p>
+            <a:endParaRPr lang="en-IN" sz="2000" dirty="0">
+              <a:solidFill>
+                <a:schemeClr val="accent6">
+                  <a:lumMod val="60000"/>
+                  <a:lumOff val="40000"/>
+                </a:schemeClr>
+              </a:solidFill>
+            </a:endParaRPr>
+          </a:p>
+          <a:p>
+            <a:r>
+              <a:rPr lang="en-IN" sz="2000" b="1" u="sng" dirty="0">
+                <a:solidFill>
+                  <a:schemeClr val="accent6">
+                    <a:lumMod val="60000"/>
+                    <a:lumOff val="40000"/>
+                  </a:schemeClr>
+                </a:solidFill>
+              </a:rPr>
+              <a:t>User:</a:t>
+            </a:r>
+            <a:r>
+              <a:rPr lang="en-IN" sz="2000" dirty="0">
+                <a:solidFill>
+                  <a:schemeClr val="accent6">
+                    <a:lumMod val="60000"/>
+                    <a:lumOff val="40000"/>
+                  </a:schemeClr>
+                </a:solidFill>
+              </a:rPr>
+              <a:t> I live in Berlin.</a:t>
+            </a:r>
+          </a:p>
+          <a:p>
+            <a:r>
+              <a:rPr lang="en-IN" sz="2000" b="1" u="sng" dirty="0">
+                <a:solidFill>
+                  <a:schemeClr val="accent6">
+                    <a:lumMod val="60000"/>
+                    <a:lumOff val="40000"/>
+                  </a:schemeClr>
+                </a:solidFill>
+              </a:rPr>
+              <a:t>Agent:</a:t>
+            </a:r>
+            <a:r>
+              <a:rPr lang="en-IN" sz="2000" dirty="0">
+                <a:solidFill>
+                  <a:schemeClr val="accent6">
+                    <a:lumMod val="60000"/>
+                    <a:lumOff val="40000"/>
+                  </a:schemeClr>
+                </a:solidFill>
+              </a:rPr>
+              <a:t> Got it. </a:t>
+            </a:r>
+          </a:p>
+          <a:p>
+            <a:endParaRPr lang="en-IN" sz="2000" dirty="0">
+              <a:solidFill>
+                <a:schemeClr val="accent6">
+                  <a:lumMod val="60000"/>
+                  <a:lumOff val="40000"/>
+                </a:schemeClr>
+              </a:solidFill>
+            </a:endParaRPr>
+          </a:p>
+          <a:p>
+            <a:r>
+              <a:rPr lang="en-IN" sz="2000" b="1" u="sng" dirty="0">
+                <a:solidFill>
+                  <a:schemeClr val="accent6">
+                    <a:lumMod val="60000"/>
+                    <a:lumOff val="40000"/>
+                  </a:schemeClr>
+                </a:solidFill>
+              </a:rPr>
+              <a:t>User</a:t>
+            </a:r>
+            <a:r>
+              <a:rPr lang="en-IN" sz="2000" dirty="0">
+                <a:solidFill>
+                  <a:schemeClr val="accent6">
+                    <a:lumMod val="60000"/>
+                    <a:lumOff val="40000"/>
+                  </a:schemeClr>
+                </a:solidFill>
+              </a:rPr>
+              <a:t>: What is my name?</a:t>
+            </a:r>
+          </a:p>
+          <a:p>
+            <a:r>
+              <a:rPr lang="en-IN" sz="2000" b="1" u="sng" dirty="0">
+                <a:solidFill>
+                  <a:schemeClr val="accent6">
+                    <a:lumMod val="60000"/>
+                    <a:lumOff val="40000"/>
+                  </a:schemeClr>
+                </a:solidFill>
+              </a:rPr>
+              <a:t>Agent:</a:t>
+            </a:r>
+            <a:r>
+              <a:rPr lang="en-IN" sz="2000" dirty="0">
+                <a:solidFill>
+                  <a:schemeClr val="accent6">
+                    <a:lumMod val="60000"/>
+                    <a:lumOff val="40000"/>
+                  </a:schemeClr>
+                </a:solidFill>
+              </a:rPr>
+              <a:t> </a:t>
+            </a:r>
+            <a:r>
+              <a:rPr lang="en-IN" sz="2000" b="1" i="1" dirty="0">
+                <a:solidFill>
+                  <a:schemeClr val="accent4">
+                    <a:lumMod val="60000"/>
+                    <a:lumOff val="40000"/>
+                  </a:schemeClr>
+                </a:solidFill>
+              </a:rPr>
+              <a:t>Ash    &lt;-- It remembers</a:t>
+            </a:r>
+          </a:p>
+        </p:txBody>
+      </p:sp>
+      <p:sp>
+        <p:nvSpPr>
+          <p:cNvPr id="13" name="TextBox 12">
+            <a:extLst>
+              <a:ext uri="{FF2B5EF4-FFF2-40B4-BE49-F238E27FC236}">
+                <a16:creationId xmlns:a16="http://schemas.microsoft.com/office/drawing/2014/main" id="{F8BF7517-516B-31A3-D2D3-BE2341D0215A}"/>
+              </a:ext>
+            </a:extLst>
+          </p:cNvPr>
+          <p:cNvSpPr txBox="1"/>
+          <p:nvPr/>
+        </p:nvSpPr>
+        <p:spPr>
+          <a:xfrm>
+            <a:off x="4942332" y="1982462"/>
+            <a:ext cx="7016496" cy="2246769"/>
+          </a:xfrm>
+          <a:prstGeom prst="rect">
+            <a:avLst/>
+          </a:prstGeom>
+          <a:noFill/>
+        </p:spPr>
+        <p:txBody>
+          <a:bodyPr wrap="square">
+            <a:spAutoFit/>
+          </a:bodyPr>
+          <a:lstStyle/>
+          <a:p>
+            <a:r>
+              <a:rPr lang="en-IN" sz="2000" b="1" u="sng" dirty="0">
+                <a:solidFill>
+                  <a:schemeClr val="accent6">
+                    <a:lumMod val="60000"/>
+                    <a:lumOff val="40000"/>
+                  </a:schemeClr>
+                </a:solidFill>
+              </a:rPr>
+              <a:t>Example 2:</a:t>
+            </a:r>
+          </a:p>
+          <a:p>
+            <a:endParaRPr lang="en-IN" sz="2000" b="1" u="sng" dirty="0">
+              <a:solidFill>
+                <a:schemeClr val="accent6">
+                  <a:lumMod val="60000"/>
+                  <a:lumOff val="40000"/>
+                </a:schemeClr>
+              </a:solidFill>
+            </a:endParaRPr>
+          </a:p>
+          <a:p>
+            <a:r>
+              <a:rPr lang="en-IN" sz="2000" b="1" u="sng" dirty="0">
+                <a:solidFill>
+                  <a:schemeClr val="accent6">
+                    <a:lumMod val="60000"/>
+                    <a:lumOff val="40000"/>
+                  </a:schemeClr>
+                </a:solidFill>
+              </a:rPr>
+              <a:t>User:</a:t>
+            </a:r>
+            <a:r>
+              <a:rPr lang="en-IN" sz="2000" u="sng" dirty="0">
+                <a:solidFill>
+                  <a:schemeClr val="accent6">
+                    <a:lumMod val="60000"/>
+                    <a:lumOff val="40000"/>
+                  </a:schemeClr>
+                </a:solidFill>
+              </a:rPr>
+              <a:t> </a:t>
+            </a:r>
+            <a:r>
+              <a:rPr lang="en-IN" sz="2000" dirty="0">
+                <a:solidFill>
+                  <a:schemeClr val="accent6">
+                    <a:lumMod val="60000"/>
+                    <a:lumOff val="40000"/>
+                  </a:schemeClr>
+                </a:solidFill>
+              </a:rPr>
+              <a:t>I took a loan of 2 lakh at 10% for 2 years. What is my EMI?</a:t>
+            </a:r>
+          </a:p>
+          <a:p>
+            <a:r>
+              <a:rPr lang="en-IN" sz="2000" b="1" u="sng" dirty="0">
+                <a:solidFill>
+                  <a:schemeClr val="accent6">
+                    <a:lumMod val="60000"/>
+                    <a:lumOff val="40000"/>
+                  </a:schemeClr>
+                </a:solidFill>
+              </a:rPr>
+              <a:t>Agent: </a:t>
+            </a:r>
+            <a:r>
+              <a:rPr lang="en-IN" sz="2000" dirty="0">
+                <a:solidFill>
+                  <a:schemeClr val="accent6">
+                    <a:lumMod val="60000"/>
+                    <a:lumOff val="40000"/>
+                  </a:schemeClr>
+                </a:solidFill>
+              </a:rPr>
+              <a:t>9,229</a:t>
+            </a:r>
+          </a:p>
+          <a:p>
+            <a:endParaRPr lang="en-IN" sz="2000" dirty="0">
+              <a:solidFill>
+                <a:schemeClr val="accent6">
+                  <a:lumMod val="60000"/>
+                  <a:lumOff val="40000"/>
+                </a:schemeClr>
+              </a:solidFill>
+            </a:endParaRPr>
+          </a:p>
+          <a:p>
+            <a:r>
+              <a:rPr lang="en-IN" sz="2000" b="1" u="sng" dirty="0">
+                <a:solidFill>
+                  <a:schemeClr val="accent6">
+                    <a:lumMod val="60000"/>
+                    <a:lumOff val="40000"/>
+                  </a:schemeClr>
+                </a:solidFill>
+              </a:rPr>
+              <a:t>User:</a:t>
+            </a:r>
+            <a:r>
+              <a:rPr lang="en-IN" sz="2000" b="1" dirty="0">
+                <a:solidFill>
+                  <a:schemeClr val="accent6">
+                    <a:lumMod val="60000"/>
+                    <a:lumOff val="40000"/>
+                  </a:schemeClr>
+                </a:solidFill>
+              </a:rPr>
+              <a:t>  </a:t>
+            </a:r>
+            <a:r>
+              <a:rPr lang="en-US" sz="2000" dirty="0">
+                <a:solidFill>
+                  <a:schemeClr val="accent6">
+                    <a:lumMod val="60000"/>
+                    <a:lumOff val="40000"/>
+                  </a:schemeClr>
+                </a:solidFill>
+              </a:rPr>
+              <a:t>Now if interest changes to 20%, then what is my EMI?</a:t>
+            </a:r>
+          </a:p>
+          <a:p>
+            <a:r>
+              <a:rPr lang="en-US" sz="2000" u="sng" dirty="0">
+                <a:solidFill>
+                  <a:schemeClr val="accent6">
+                    <a:lumMod val="60000"/>
+                    <a:lumOff val="40000"/>
+                  </a:schemeClr>
+                </a:solidFill>
+              </a:rPr>
+              <a:t>Agent</a:t>
+            </a:r>
+            <a:r>
+              <a:rPr lang="en-US" sz="2000" dirty="0">
+                <a:solidFill>
+                  <a:schemeClr val="accent6">
+                    <a:lumMod val="60000"/>
+                    <a:lumOff val="40000"/>
+                  </a:schemeClr>
+                </a:solidFill>
+              </a:rPr>
+              <a:t>: </a:t>
+            </a:r>
+            <a:r>
+              <a:rPr lang="en-US" sz="2000" b="1" dirty="0">
+                <a:solidFill>
+                  <a:schemeClr val="accent4">
+                    <a:lumMod val="60000"/>
+                    <a:lumOff val="40000"/>
+                  </a:schemeClr>
+                </a:solidFill>
+              </a:rPr>
+              <a:t>(The agent may hallucinate and make up wrong figures)</a:t>
+            </a:r>
+            <a:endParaRPr lang="en-IN" sz="2000" b="1" dirty="0">
+              <a:solidFill>
+                <a:schemeClr val="accent4">
+                  <a:lumMod val="60000"/>
+                  <a:lumOff val="40000"/>
+                </a:schemeClr>
+              </a:solidFill>
+            </a:endParaRPr>
+          </a:p>
+        </p:txBody>
+      </p:sp>
+    </p:spTree>
+    <p:extLst>
+      <p:ext uri="{BB962C8B-B14F-4D97-AF65-F5344CB8AC3E}">
+        <p14:creationId xmlns:p14="http://schemas.microsoft.com/office/powerpoint/2010/main" val="732861703"/>
+      </p:ext>
+    </p:extLst>
+  </p:cSld>
+  <p:clrMapOvr>
+    <a:masterClrMapping/>
+  </p:clrMapOvr>
+</p:sld>
+</file>
+
+<file path=ppt/slides/slide4.xml><?xml version="1.0" encoding="utf-8"?>
+<p:sld xmlns:a="http://schemas.openxmlformats.org/drawingml/2006/main" xmlns:r="http://schemas.openxmlformats.org/officeDocument/2006/relationships" xmlns:p="http://schemas.openxmlformats.org/presentationml/2006/main">
+  <p:cSld>
+    <p:spTree>
+      <p:nvGrpSpPr>
+        <p:cNvPr id="1" name="">
+          <a:extLst>
+            <a:ext uri="{FF2B5EF4-FFF2-40B4-BE49-F238E27FC236}">
+              <a16:creationId xmlns:a16="http://schemas.microsoft.com/office/drawing/2014/main" id="{C0C594E0-30AF-EA30-6152-3CAD8FF3EEEC}"/>
+            </a:ext>
+          </a:extLst>
+        </p:cNvPr>
+        <p:cNvGrpSpPr/>
+        <p:nvPr/>
+      </p:nvGrpSpPr>
+      <p:grpSpPr>
+        <a:xfrm>
+          <a:off x="0" y="0"/>
+          <a:ext cx="0" cy="0"/>
+          <a:chOff x="0" y="0"/>
+          <a:chExt cx="0" cy="0"/>
+        </a:xfrm>
+      </p:grpSpPr>
+      <p:sp>
+        <p:nvSpPr>
+          <p:cNvPr id="5" name="TextBox 4">
+            <a:extLst>
+              <a:ext uri="{FF2B5EF4-FFF2-40B4-BE49-F238E27FC236}">
+                <a16:creationId xmlns:a16="http://schemas.microsoft.com/office/drawing/2014/main" id="{BBB59FD9-BC6D-30AF-59F0-2AD92D944B4F}"/>
+              </a:ext>
+            </a:extLst>
+          </p:cNvPr>
+          <p:cNvSpPr txBox="1"/>
+          <p:nvPr/>
+        </p:nvSpPr>
+        <p:spPr>
+          <a:xfrm>
+            <a:off x="3200400" y="198257"/>
+            <a:ext cx="5120640" cy="461665"/>
+          </a:xfrm>
+          <a:prstGeom prst="rect">
+            <a:avLst/>
+          </a:prstGeom>
+          <a:noFill/>
+        </p:spPr>
+        <p:txBody>
+          <a:bodyPr wrap="square">
+            <a:spAutoFit/>
+          </a:bodyPr>
+          <a:lstStyle/>
+          <a:p>
+            <a:r>
+              <a:rPr lang="en-IN" sz="2400" b="1" u="sng" dirty="0">
+                <a:solidFill>
+                  <a:schemeClr val="accent6">
+                    <a:lumMod val="60000"/>
+                    <a:lumOff val="40000"/>
+                  </a:schemeClr>
+                </a:solidFill>
+              </a:rPr>
+              <a:t>Long-term memory</a:t>
+            </a:r>
+          </a:p>
+        </p:txBody>
+      </p:sp>
+      <p:sp>
+        <p:nvSpPr>
+          <p:cNvPr id="10" name="TextBox 9">
+            <a:extLst>
+              <a:ext uri="{FF2B5EF4-FFF2-40B4-BE49-F238E27FC236}">
+                <a16:creationId xmlns:a16="http://schemas.microsoft.com/office/drawing/2014/main" id="{AD61C926-8AA1-255D-7076-BA198AA1B950}"/>
+              </a:ext>
+            </a:extLst>
+          </p:cNvPr>
+          <p:cNvSpPr txBox="1"/>
+          <p:nvPr/>
+        </p:nvSpPr>
+        <p:spPr>
+          <a:xfrm>
+            <a:off x="522732" y="1687174"/>
+            <a:ext cx="3656076" cy="3447098"/>
+          </a:xfrm>
+          <a:prstGeom prst="rect">
+            <a:avLst/>
+          </a:prstGeom>
+          <a:noFill/>
+        </p:spPr>
+        <p:txBody>
+          <a:bodyPr wrap="square">
+            <a:spAutoFit/>
+          </a:bodyPr>
+          <a:lstStyle/>
+          <a:p>
+            <a:pPr algn="ctr"/>
+            <a:r>
+              <a:rPr lang="en-IN" sz="2000" b="1" u="sng" dirty="0">
+                <a:solidFill>
+                  <a:schemeClr val="accent6">
+                    <a:lumMod val="60000"/>
+                    <a:lumOff val="40000"/>
+                  </a:schemeClr>
+                </a:solidFill>
+              </a:rPr>
+              <a:t>Conversation 1:</a:t>
+            </a:r>
+          </a:p>
+          <a:p>
+            <a:endParaRPr lang="en-IN" sz="2000" b="1" u="sng" dirty="0">
+              <a:solidFill>
+                <a:schemeClr val="accent6">
+                  <a:lumMod val="60000"/>
+                  <a:lumOff val="40000"/>
+                </a:schemeClr>
+              </a:solidFill>
+            </a:endParaRPr>
+          </a:p>
+          <a:p>
+            <a:r>
+              <a:rPr lang="en-IN" sz="2000" b="1" u="sng" dirty="0">
+                <a:solidFill>
+                  <a:schemeClr val="accent6">
+                    <a:lumMod val="60000"/>
+                    <a:lumOff val="40000"/>
+                  </a:schemeClr>
+                </a:solidFill>
+              </a:rPr>
+              <a:t>User: </a:t>
+            </a:r>
+            <a:r>
+              <a:rPr lang="en-IN" sz="2000" dirty="0">
+                <a:solidFill>
+                  <a:schemeClr val="accent6">
+                    <a:lumMod val="60000"/>
+                    <a:lumOff val="40000"/>
+                  </a:schemeClr>
+                </a:solidFill>
+              </a:rPr>
+              <a:t>My name is Ash. </a:t>
+            </a:r>
+          </a:p>
+          <a:p>
+            <a:r>
+              <a:rPr lang="en-IN" sz="2000" b="1" u="sng" dirty="0">
+                <a:solidFill>
+                  <a:schemeClr val="accent6">
+                    <a:lumMod val="60000"/>
+                    <a:lumOff val="40000"/>
+                  </a:schemeClr>
+                </a:solidFill>
+              </a:rPr>
+              <a:t>Agent: </a:t>
+            </a:r>
+            <a:r>
+              <a:rPr lang="en-IN" sz="2000" dirty="0">
+                <a:solidFill>
+                  <a:schemeClr val="accent6">
+                    <a:lumMod val="60000"/>
+                    <a:lumOff val="40000"/>
+                  </a:schemeClr>
+                </a:solidFill>
+              </a:rPr>
+              <a:t>Nice to meet you, Ash.</a:t>
+            </a:r>
+          </a:p>
+          <a:p>
+            <a:endParaRPr lang="en-IN" sz="2000" dirty="0">
+              <a:solidFill>
+                <a:schemeClr val="accent6">
+                  <a:lumMod val="60000"/>
+                  <a:lumOff val="40000"/>
+                </a:schemeClr>
+              </a:solidFill>
+            </a:endParaRPr>
+          </a:p>
+          <a:p>
+            <a:r>
+              <a:rPr lang="en-IN" sz="2000" b="1" u="sng" dirty="0">
+                <a:solidFill>
+                  <a:schemeClr val="accent6">
+                    <a:lumMod val="60000"/>
+                    <a:lumOff val="40000"/>
+                  </a:schemeClr>
+                </a:solidFill>
+              </a:rPr>
+              <a:t>User: </a:t>
+            </a:r>
+            <a:r>
+              <a:rPr lang="en-IN" sz="2000" dirty="0">
+                <a:solidFill>
+                  <a:schemeClr val="accent6">
+                    <a:lumMod val="60000"/>
+                    <a:lumOff val="40000"/>
+                  </a:schemeClr>
+                </a:solidFill>
+              </a:rPr>
+              <a:t>I live in Berlin.</a:t>
+            </a:r>
+          </a:p>
+          <a:p>
+            <a:r>
+              <a:rPr lang="en-IN" sz="2000" b="1" u="sng" dirty="0">
+                <a:solidFill>
+                  <a:schemeClr val="accent6">
+                    <a:lumMod val="60000"/>
+                    <a:lumOff val="40000"/>
+                  </a:schemeClr>
+                </a:solidFill>
+              </a:rPr>
+              <a:t>Agent: </a:t>
+            </a:r>
+            <a:r>
+              <a:rPr lang="en-IN" sz="2000" dirty="0">
+                <a:solidFill>
+                  <a:schemeClr val="accent6">
+                    <a:lumMod val="60000"/>
+                    <a:lumOff val="40000"/>
+                  </a:schemeClr>
+                </a:solidFill>
+              </a:rPr>
+              <a:t>Got it. </a:t>
+            </a:r>
+          </a:p>
+          <a:p>
+            <a:endParaRPr lang="en-IN" sz="2000" dirty="0">
+              <a:solidFill>
+                <a:schemeClr val="accent6">
+                  <a:lumMod val="60000"/>
+                  <a:lumOff val="40000"/>
+                </a:schemeClr>
+              </a:solidFill>
+            </a:endParaRPr>
+          </a:p>
+          <a:p>
+            <a:r>
+              <a:rPr lang="en-IN" sz="2000" b="1" u="sng" dirty="0">
+                <a:solidFill>
+                  <a:schemeClr val="accent6">
+                    <a:lumMod val="60000"/>
+                    <a:lumOff val="40000"/>
+                  </a:schemeClr>
+                </a:solidFill>
+              </a:rPr>
+              <a:t>User: </a:t>
+            </a:r>
+            <a:r>
+              <a:rPr lang="en-IN" sz="2000" dirty="0">
+                <a:solidFill>
+                  <a:schemeClr val="accent6">
+                    <a:lumMod val="60000"/>
+                    <a:lumOff val="40000"/>
+                  </a:schemeClr>
+                </a:solidFill>
+              </a:rPr>
+              <a:t>I am thinking of going to India</a:t>
+            </a:r>
+          </a:p>
+          <a:p>
+            <a:r>
+              <a:rPr lang="en-IN" sz="2000" b="1" u="sng" dirty="0">
+                <a:solidFill>
+                  <a:schemeClr val="accent6">
+                    <a:lumMod val="60000"/>
+                    <a:lumOff val="40000"/>
+                  </a:schemeClr>
+                </a:solidFill>
+              </a:rPr>
+              <a:t>Agent: </a:t>
+            </a:r>
+            <a:r>
+              <a:rPr lang="en-IN" sz="2000" dirty="0">
+                <a:solidFill>
+                  <a:schemeClr val="accent6">
+                    <a:lumMod val="60000"/>
+                    <a:lumOff val="40000"/>
+                  </a:schemeClr>
+                </a:solidFill>
+              </a:rPr>
+              <a:t>I think it is good idea</a:t>
+            </a:r>
+            <a:endParaRPr lang="en-IN" sz="2000" b="1" i="1" dirty="0">
+              <a:solidFill>
+                <a:schemeClr val="accent4">
+                  <a:lumMod val="60000"/>
+                  <a:lumOff val="40000"/>
+                </a:schemeClr>
+              </a:solidFill>
+            </a:endParaRPr>
+          </a:p>
+        </p:txBody>
+      </p:sp>
+      <p:sp>
+        <p:nvSpPr>
+          <p:cNvPr id="12" name="TextBox 11">
+            <a:extLst>
+              <a:ext uri="{FF2B5EF4-FFF2-40B4-BE49-F238E27FC236}">
+                <a16:creationId xmlns:a16="http://schemas.microsoft.com/office/drawing/2014/main" id="{E0CE6DDE-8A1C-B5B8-4C3A-03EEBBAE2967}"/>
+              </a:ext>
+            </a:extLst>
+          </p:cNvPr>
+          <p:cNvSpPr txBox="1"/>
+          <p:nvPr/>
+        </p:nvSpPr>
+        <p:spPr>
+          <a:xfrm>
+            <a:off x="6355080" y="1751182"/>
+            <a:ext cx="5542788" cy="2246769"/>
+          </a:xfrm>
+          <a:prstGeom prst="rect">
+            <a:avLst/>
+          </a:prstGeom>
+          <a:noFill/>
+        </p:spPr>
+        <p:txBody>
+          <a:bodyPr wrap="square">
+            <a:spAutoFit/>
+          </a:bodyPr>
+          <a:lstStyle/>
+          <a:p>
+            <a:pPr algn="ctr"/>
+            <a:r>
+              <a:rPr lang="en-IN" sz="2000" b="1" u="sng" dirty="0">
+                <a:solidFill>
+                  <a:schemeClr val="accent6">
+                    <a:lumMod val="60000"/>
+                    <a:lumOff val="40000"/>
+                  </a:schemeClr>
+                </a:solidFill>
+              </a:rPr>
+              <a:t>Conversation 2:</a:t>
+            </a:r>
+          </a:p>
+          <a:p>
+            <a:endParaRPr lang="en-IN" sz="2000" b="1" u="sng" dirty="0">
+              <a:solidFill>
+                <a:schemeClr val="accent6">
+                  <a:lumMod val="60000"/>
+                  <a:lumOff val="40000"/>
+                </a:schemeClr>
+              </a:solidFill>
+            </a:endParaRPr>
+          </a:p>
+          <a:p>
+            <a:r>
+              <a:rPr lang="en-IN" sz="2000" b="1" u="sng" dirty="0">
+                <a:solidFill>
+                  <a:schemeClr val="accent6">
+                    <a:lumMod val="60000"/>
+                    <a:lumOff val="40000"/>
+                  </a:schemeClr>
+                </a:solidFill>
+              </a:rPr>
+              <a:t>User: </a:t>
+            </a:r>
+            <a:r>
+              <a:rPr lang="en-IN" sz="2000" dirty="0">
+                <a:solidFill>
+                  <a:schemeClr val="accent6">
+                    <a:lumMod val="60000"/>
+                    <a:lumOff val="40000"/>
+                  </a:schemeClr>
+                </a:solidFill>
+              </a:rPr>
+              <a:t>How much is ticket to India ? </a:t>
+            </a:r>
+          </a:p>
+          <a:p>
+            <a:r>
+              <a:rPr lang="en-IN" sz="2000" b="1" u="sng" dirty="0">
+                <a:solidFill>
+                  <a:schemeClr val="accent6">
+                    <a:lumMod val="60000"/>
+                    <a:lumOff val="40000"/>
+                  </a:schemeClr>
+                </a:solidFill>
+              </a:rPr>
+              <a:t>Agent: </a:t>
+            </a:r>
+            <a:r>
+              <a:rPr lang="en-IN" sz="2000" dirty="0">
+                <a:solidFill>
+                  <a:schemeClr val="accent6">
+                    <a:lumMod val="60000"/>
+                    <a:lumOff val="40000"/>
+                  </a:schemeClr>
+                </a:solidFill>
+              </a:rPr>
+              <a:t>The price of ticket from  </a:t>
+            </a:r>
+            <a:r>
+              <a:rPr lang="en-IN" sz="2000" b="1" i="1" dirty="0">
+                <a:solidFill>
+                  <a:schemeClr val="accent6">
+                    <a:lumMod val="60000"/>
+                    <a:lumOff val="40000"/>
+                  </a:schemeClr>
+                </a:solidFill>
+              </a:rPr>
+              <a:t>Berlin</a:t>
+            </a:r>
+            <a:r>
+              <a:rPr lang="en-IN" sz="2000" dirty="0">
+                <a:solidFill>
+                  <a:schemeClr val="accent6">
+                    <a:lumMod val="60000"/>
+                    <a:lumOff val="40000"/>
+                  </a:schemeClr>
+                </a:solidFill>
+              </a:rPr>
+              <a:t> to India could range from  $ 1000 to $ 1500</a:t>
+            </a:r>
+          </a:p>
+          <a:p>
+            <a:endParaRPr lang="en-IN" sz="2000" dirty="0">
+              <a:solidFill>
+                <a:schemeClr val="accent6">
+                  <a:lumMod val="60000"/>
+                  <a:lumOff val="40000"/>
+                </a:schemeClr>
+              </a:solidFill>
+            </a:endParaRPr>
+          </a:p>
+          <a:p>
+            <a:r>
+              <a:rPr lang="en-IN" sz="2000" b="1" dirty="0">
+                <a:solidFill>
+                  <a:schemeClr val="accent4">
+                    <a:lumMod val="60000"/>
+                    <a:lumOff val="40000"/>
+                  </a:schemeClr>
+                </a:solidFill>
+              </a:rPr>
+              <a:t>It remembers the city Berlin from conversation 1</a:t>
+            </a:r>
+          </a:p>
+        </p:txBody>
+      </p:sp>
+    </p:spTree>
+    <p:extLst>
+      <p:ext uri="{BB962C8B-B14F-4D97-AF65-F5344CB8AC3E}">
+        <p14:creationId xmlns:p14="http://schemas.microsoft.com/office/powerpoint/2010/main" val="1182758692"/>
+      </p:ext>
+    </p:extLst>
+  </p:cSld>
+  <p:clrMapOvr>
+    <a:masterClrMapping/>
+  </p:clrMapOvr>
+</p:sld>
+</file>
+
+<file path=ppt/slides/slide5.xml><?xml version="1.0" encoding="utf-8"?>
+<p:sld xmlns:a="http://schemas.openxmlformats.org/drawingml/2006/main" xmlns:r="http://schemas.openxmlformats.org/officeDocument/2006/relationships" xmlns:p="http://schemas.openxmlformats.org/presentationml/2006/main">
+  <p:cSld>
+    <p:spTree>
+      <p:nvGrpSpPr>
+        <p:cNvPr id="1" name=""/>
+        <p:cNvGrpSpPr/>
+        <p:nvPr/>
+      </p:nvGrpSpPr>
+      <p:grpSpPr>
+        <a:xfrm>
+          <a:off x="0" y="0"/>
+          <a:ext cx="0" cy="0"/>
+          <a:chOff x="0" y="0"/>
+          <a:chExt cx="0" cy="0"/>
+        </a:xfrm>
+      </p:grpSpPr>
+      <p:sp>
+        <p:nvSpPr>
+          <p:cNvPr id="3" name="Rectangle: Rounded Corners 2">
+            <a:extLst>
+              <a:ext uri="{FF2B5EF4-FFF2-40B4-BE49-F238E27FC236}">
+                <a16:creationId xmlns:a16="http://schemas.microsoft.com/office/drawing/2014/main" id="{913ED8FD-8A89-D4E9-27EB-C95104D8160A}"/>
+              </a:ext>
+            </a:extLst>
+          </p:cNvPr>
+          <p:cNvSpPr/>
+          <p:nvPr/>
+        </p:nvSpPr>
+        <p:spPr>
+          <a:xfrm>
+            <a:off x="3648456" y="402336"/>
+            <a:ext cx="914400" cy="914400"/>
+          </a:xfrm>
+          <a:prstGeom prst="roundRect">
+            <a:avLst/>
+          </a:prstGeom>
+        </p:spPr>
+        <p:style>
+          <a:lnRef idx="2">
+            <a:schemeClr val="accent1">
+              <a:shade val="15000"/>
+            </a:schemeClr>
+          </a:lnRef>
+          <a:fillRef idx="1">
+            <a:schemeClr val="accent1"/>
+          </a:fillRef>
+          <a:effectRef idx="0">
+            <a:schemeClr val="accent1"/>
+          </a:effectRef>
+          <a:fontRef idx="minor">
+            <a:schemeClr val="lt1"/>
+          </a:fontRef>
+        </p:style>
+        <p:txBody>
+          <a:bodyPr rtlCol="0" anchor="ctr"/>
+          <a:lstStyle/>
+          <a:p>
+            <a:pPr algn="ctr"/>
+            <a:r>
+              <a:rPr lang="en-US" dirty="0"/>
+              <a:t>Agent</a:t>
+            </a:r>
+            <a:endParaRPr lang="en-IN" dirty="0"/>
+          </a:p>
+        </p:txBody>
+      </p:sp>
+      <p:sp>
+        <p:nvSpPr>
+          <p:cNvPr id="6" name="Rectangle: Rounded Corners 5">
+            <a:extLst>
+              <a:ext uri="{FF2B5EF4-FFF2-40B4-BE49-F238E27FC236}">
+                <a16:creationId xmlns:a16="http://schemas.microsoft.com/office/drawing/2014/main" id="{C01E4A15-60D0-D197-0FD5-7599CF896F71}"/>
+              </a:ext>
+            </a:extLst>
+          </p:cNvPr>
+          <p:cNvSpPr/>
+          <p:nvPr/>
+        </p:nvSpPr>
+        <p:spPr>
+          <a:xfrm>
+            <a:off x="710184" y="2063496"/>
+            <a:ext cx="2938272" cy="914400"/>
+          </a:xfrm>
+          <a:prstGeom prst="roundRect">
+            <a:avLst/>
+          </a:prstGeom>
+        </p:spPr>
+        <p:style>
+          <a:lnRef idx="2">
+            <a:schemeClr val="accent1">
+              <a:shade val="15000"/>
+            </a:schemeClr>
+          </a:lnRef>
+          <a:fillRef idx="1">
+            <a:schemeClr val="accent1"/>
+          </a:fillRef>
+          <a:effectRef idx="0">
+            <a:schemeClr val="accent1"/>
+          </a:effectRef>
+          <a:fontRef idx="minor">
+            <a:schemeClr val="lt1"/>
+          </a:fontRef>
+        </p:style>
+        <p:txBody>
+          <a:bodyPr rtlCol="0" anchor="ctr"/>
+          <a:lstStyle/>
+          <a:p>
+            <a:pPr algn="ctr"/>
+            <a:r>
+              <a:rPr lang="en-US" b="1" dirty="0"/>
+              <a:t>Short-term memory</a:t>
+            </a:r>
+          </a:p>
+          <a:p>
+            <a:pPr marL="285750" indent="-285750">
+              <a:buFont typeface="Arial" panose="020B0604020202020204" pitchFamily="34" charset="0"/>
+              <a:buChar char="•"/>
+            </a:pPr>
+            <a:r>
+              <a:rPr lang="en-US" dirty="0"/>
+              <a:t>SQLite (Local / POC)</a:t>
+            </a:r>
+          </a:p>
+          <a:p>
+            <a:pPr marL="285750" indent="-285750">
+              <a:buFont typeface="Arial" panose="020B0604020202020204" pitchFamily="34" charset="0"/>
+              <a:buChar char="•"/>
+            </a:pPr>
+            <a:r>
+              <a:rPr lang="en-US" dirty="0" err="1"/>
+              <a:t>PostGreSQL</a:t>
+            </a:r>
+            <a:r>
+              <a:rPr lang="en-US" dirty="0"/>
+              <a:t> (Industry)</a:t>
+            </a:r>
+            <a:endParaRPr lang="en-IN" dirty="0"/>
+          </a:p>
+        </p:txBody>
+      </p:sp>
+      <p:sp>
+        <p:nvSpPr>
+          <p:cNvPr id="8" name="Rectangle: Rounded Corners 7">
+            <a:extLst>
+              <a:ext uri="{FF2B5EF4-FFF2-40B4-BE49-F238E27FC236}">
+                <a16:creationId xmlns:a16="http://schemas.microsoft.com/office/drawing/2014/main" id="{090A5120-544A-94E1-5E97-CB9216E33694}"/>
+              </a:ext>
+            </a:extLst>
+          </p:cNvPr>
+          <p:cNvSpPr/>
+          <p:nvPr/>
+        </p:nvSpPr>
+        <p:spPr>
+          <a:xfrm>
+            <a:off x="4690872" y="2127504"/>
+            <a:ext cx="3035808" cy="914400"/>
+          </a:xfrm>
+          <a:prstGeom prst="roundRect">
+            <a:avLst/>
+          </a:prstGeom>
+        </p:spPr>
+        <p:style>
+          <a:lnRef idx="2">
+            <a:schemeClr val="accent1">
+              <a:shade val="15000"/>
+            </a:schemeClr>
+          </a:lnRef>
+          <a:fillRef idx="1">
+            <a:schemeClr val="accent1"/>
+          </a:fillRef>
+          <a:effectRef idx="0">
+            <a:schemeClr val="accent1"/>
+          </a:effectRef>
+          <a:fontRef idx="minor">
+            <a:schemeClr val="lt1"/>
+          </a:fontRef>
+        </p:style>
+        <p:txBody>
+          <a:bodyPr rtlCol="0" anchor="ctr"/>
+          <a:lstStyle/>
+          <a:p>
+            <a:pPr algn="ctr"/>
+            <a:r>
+              <a:rPr lang="en-US" b="1" dirty="0"/>
+              <a:t>Long-term memory</a:t>
+            </a:r>
+          </a:p>
+          <a:p>
+            <a:pPr marL="285750" indent="-285750">
+              <a:buFont typeface="Arial" panose="020B0604020202020204" pitchFamily="34" charset="0"/>
+              <a:buChar char="•"/>
+            </a:pPr>
+            <a:r>
+              <a:rPr lang="en-US" dirty="0" err="1"/>
+              <a:t>PineCone</a:t>
+            </a:r>
+            <a:r>
+              <a:rPr lang="en-US" dirty="0"/>
+              <a:t> (Industry)</a:t>
+            </a:r>
+            <a:endParaRPr lang="en-IN" dirty="0"/>
+          </a:p>
+        </p:txBody>
+      </p:sp>
+      <p:sp>
+        <p:nvSpPr>
+          <p:cNvPr id="16" name="Arrow: Right 15">
+            <a:extLst>
+              <a:ext uri="{FF2B5EF4-FFF2-40B4-BE49-F238E27FC236}">
+                <a16:creationId xmlns:a16="http://schemas.microsoft.com/office/drawing/2014/main" id="{A0BEF5E4-928A-23CF-CB48-54B58CE73CCF}"/>
+              </a:ext>
+            </a:extLst>
+          </p:cNvPr>
+          <p:cNvSpPr/>
+          <p:nvPr/>
+        </p:nvSpPr>
+        <p:spPr>
+          <a:xfrm rot="6973933">
+            <a:off x="3048716" y="1414783"/>
+            <a:ext cx="728472" cy="484632"/>
+          </a:xfrm>
+          <a:prstGeom prst="rightArrow">
+            <a:avLst/>
+          </a:prstGeom>
+        </p:spPr>
+        <p:style>
+          <a:lnRef idx="2">
+            <a:schemeClr val="accent1">
+              <a:shade val="15000"/>
+            </a:schemeClr>
+          </a:lnRef>
+          <a:fillRef idx="1">
+            <a:schemeClr val="accent1"/>
+          </a:fillRef>
+          <a:effectRef idx="0">
+            <a:schemeClr val="accent1"/>
+          </a:effectRef>
+          <a:fontRef idx="minor">
+            <a:schemeClr val="lt1"/>
+          </a:fontRef>
+        </p:style>
+        <p:txBody>
+          <a:bodyPr rtlCol="0" anchor="ctr"/>
+          <a:lstStyle/>
+          <a:p>
+            <a:pPr algn="ctr"/>
+            <a:endParaRPr lang="en-IN"/>
+          </a:p>
+        </p:txBody>
+      </p:sp>
+      <p:sp>
+        <p:nvSpPr>
+          <p:cNvPr id="18" name="Arrow: Right 17">
+            <a:extLst>
+              <a:ext uri="{FF2B5EF4-FFF2-40B4-BE49-F238E27FC236}">
+                <a16:creationId xmlns:a16="http://schemas.microsoft.com/office/drawing/2014/main" id="{57A51E57-605C-94F0-DCE4-DF3D01FC2DEA}"/>
+              </a:ext>
+            </a:extLst>
+          </p:cNvPr>
+          <p:cNvSpPr/>
+          <p:nvPr/>
+        </p:nvSpPr>
+        <p:spPr>
+          <a:xfrm rot="3603537">
+            <a:off x="4420710" y="1448621"/>
+            <a:ext cx="728472" cy="484632"/>
+          </a:xfrm>
+          <a:prstGeom prst="rightArrow">
+            <a:avLst/>
+          </a:prstGeom>
+        </p:spPr>
+        <p:style>
+          <a:lnRef idx="2">
+            <a:schemeClr val="accent1">
+              <a:shade val="15000"/>
+            </a:schemeClr>
+          </a:lnRef>
+          <a:fillRef idx="1">
+            <a:schemeClr val="accent1"/>
+          </a:fillRef>
+          <a:effectRef idx="0">
+            <a:schemeClr val="accent1"/>
+          </a:effectRef>
+          <a:fontRef idx="minor">
+            <a:schemeClr val="lt1"/>
+          </a:fontRef>
+        </p:style>
+        <p:txBody>
+          <a:bodyPr rtlCol="0" anchor="ctr"/>
+          <a:lstStyle/>
+          <a:p>
+            <a:pPr algn="ctr"/>
+            <a:endParaRPr lang="en-IN"/>
+          </a:p>
+        </p:txBody>
+      </p:sp>
+    </p:spTree>
+    <p:extLst>
+      <p:ext uri="{BB962C8B-B14F-4D97-AF65-F5344CB8AC3E}">
+        <p14:creationId xmlns:p14="http://schemas.microsoft.com/office/powerpoint/2010/main" val="130278013"/>
+      </p:ext>
+    </p:extLst>
+  </p:cSld>
+  <p:clrMapOvr>
+    <a:masterClrMapping/>
+  </p:clrMapOvr>
+</p:sld>
+</file>
+
+<file path=ppt/slides/slide6.xml><?xml version="1.0" encoding="utf-8"?>
+<p:sld xmlns:a="http://schemas.openxmlformats.org/drawingml/2006/main" xmlns:r="http://schemas.openxmlformats.org/officeDocument/2006/relationships" xmlns:p="http://schemas.openxmlformats.org/presentationml/2006/main">
+  <p:cSld>
+    <p:spTree>
+      <p:nvGrpSpPr>
+        <p:cNvPr id="1" name="">
+          <a:extLst>
+            <a:ext uri="{FF2B5EF4-FFF2-40B4-BE49-F238E27FC236}">
+              <a16:creationId xmlns:a16="http://schemas.microsoft.com/office/drawing/2014/main" id="{877797A0-CA55-C755-3A62-5C45BEFD3980}"/>
+            </a:ext>
+          </a:extLst>
+        </p:cNvPr>
+        <p:cNvGrpSpPr/>
+        <p:nvPr/>
+      </p:nvGrpSpPr>
+      <p:grpSpPr>
+        <a:xfrm>
+          <a:off x="0" y="0"/>
+          <a:ext cx="0" cy="0"/>
+          <a:chOff x="0" y="0"/>
+          <a:chExt cx="0" cy="0"/>
+        </a:xfrm>
+      </p:grpSpPr>
+      <p:sp>
+        <p:nvSpPr>
+          <p:cNvPr id="5" name="TextBox 4">
+            <a:extLst>
+              <a:ext uri="{FF2B5EF4-FFF2-40B4-BE49-F238E27FC236}">
+                <a16:creationId xmlns:a16="http://schemas.microsoft.com/office/drawing/2014/main" id="{238520C7-3D5E-3DFD-2325-37862698A271}"/>
+              </a:ext>
+            </a:extLst>
+          </p:cNvPr>
+          <p:cNvSpPr txBox="1"/>
+          <p:nvPr/>
+        </p:nvSpPr>
+        <p:spPr>
+          <a:xfrm>
+            <a:off x="100584" y="304628"/>
+            <a:ext cx="8577072" cy="1938992"/>
+          </a:xfrm>
+          <a:prstGeom prst="rect">
+            <a:avLst/>
+          </a:prstGeom>
+          <a:noFill/>
+        </p:spPr>
+        <p:txBody>
+          <a:bodyPr wrap="square">
+            <a:spAutoFit/>
+          </a:bodyPr>
+          <a:lstStyle/>
+          <a:p>
+            <a:pPr>
+              <a:buNone/>
+            </a:pPr>
+            <a:r>
+              <a:rPr lang="en-US" sz="2400" b="1" dirty="0">
+                <a:solidFill>
+                  <a:schemeClr val="accent6">
+                    <a:lumMod val="60000"/>
+                    <a:lumOff val="40000"/>
+                  </a:schemeClr>
+                </a:solidFill>
+              </a:rPr>
+              <a:t>Short-Term Memory:</a:t>
+            </a:r>
+          </a:p>
+          <a:p>
+            <a:pPr>
+              <a:buNone/>
+            </a:pPr>
+            <a:endParaRPr lang="en-US" sz="2400" b="1" dirty="0">
+              <a:solidFill>
+                <a:schemeClr val="accent6">
+                  <a:lumMod val="60000"/>
+                  <a:lumOff val="40000"/>
+                </a:schemeClr>
+              </a:solidFill>
+            </a:endParaRPr>
+          </a:p>
+          <a:p>
+            <a:pPr>
+              <a:buNone/>
+            </a:pPr>
+            <a:r>
+              <a:rPr lang="en-US" sz="2400" dirty="0">
+                <a:solidFill>
+                  <a:schemeClr val="accent6">
+                    <a:lumMod val="60000"/>
+                    <a:lumOff val="40000"/>
+                  </a:schemeClr>
+                </a:solidFill>
+              </a:rPr>
+              <a:t>Agents use a technique called </a:t>
+            </a:r>
+            <a:r>
+              <a:rPr lang="en-US" sz="2400" b="1" dirty="0">
+                <a:solidFill>
+                  <a:schemeClr val="accent6">
+                    <a:lumMod val="60000"/>
+                    <a:lumOff val="40000"/>
+                  </a:schemeClr>
+                </a:solidFill>
+              </a:rPr>
+              <a:t>memory summarization</a:t>
+            </a:r>
+            <a:r>
+              <a:rPr lang="en-US" sz="2400" dirty="0">
+                <a:solidFill>
+                  <a:schemeClr val="accent6">
+                    <a:lumMod val="60000"/>
+                    <a:lumOff val="40000"/>
+                  </a:schemeClr>
+                </a:solidFill>
+              </a:rPr>
+              <a:t> — periodically compressing older conversation into a summary, keeping the gist without keeping every word. </a:t>
+            </a:r>
+          </a:p>
+        </p:txBody>
+      </p:sp>
+    </p:spTree>
+    <p:extLst>
+      <p:ext uri="{BB962C8B-B14F-4D97-AF65-F5344CB8AC3E}">
+        <p14:creationId xmlns:p14="http://schemas.microsoft.com/office/powerpoint/2010/main" val="3737621784"/>
+      </p:ext>
+    </p:extLst>
+  </p:cSld>
+  <p:clrMapOvr>
+    <a:masterClrMapping/>
+  </p:clrMapOvr>
+</p:sld>
+</file>
+
+<file path=ppt/slides/slide7.xml><?xml version="1.0" encoding="utf-8"?>
+<p:sld xmlns:a="http://schemas.openxmlformats.org/drawingml/2006/main" xmlns:r="http://schemas.openxmlformats.org/officeDocument/2006/relationships" xmlns:p="http://schemas.openxmlformats.org/presentationml/2006/main">
+  <p:cSld>
+    <p:spTree>
+      <p:nvGrpSpPr>
+        <p:cNvPr id="1" name="">
+          <a:extLst>
+            <a:ext uri="{FF2B5EF4-FFF2-40B4-BE49-F238E27FC236}">
+              <a16:creationId xmlns:a16="http://schemas.microsoft.com/office/drawing/2014/main" id="{D2739DFC-D025-2ECD-48D7-4BED0CD98DCB}"/>
+            </a:ext>
+          </a:extLst>
+        </p:cNvPr>
+        <p:cNvGrpSpPr/>
+        <p:nvPr/>
+      </p:nvGrpSpPr>
+      <p:grpSpPr>
+        <a:xfrm>
+          <a:off x="0" y="0"/>
+          <a:ext cx="0" cy="0"/>
+          <a:chOff x="0" y="0"/>
+          <a:chExt cx="0" cy="0"/>
+        </a:xfrm>
+      </p:grpSpPr>
+      <p:sp>
+        <p:nvSpPr>
+          <p:cNvPr id="5" name="TextBox 4">
+            <a:extLst>
+              <a:ext uri="{FF2B5EF4-FFF2-40B4-BE49-F238E27FC236}">
+                <a16:creationId xmlns:a16="http://schemas.microsoft.com/office/drawing/2014/main" id="{C6906320-5AB1-0C3D-E59E-7B20B3E50A54}"/>
+              </a:ext>
+            </a:extLst>
+          </p:cNvPr>
+          <p:cNvSpPr txBox="1"/>
+          <p:nvPr/>
+        </p:nvSpPr>
+        <p:spPr>
+          <a:xfrm>
+            <a:off x="100584" y="304628"/>
+            <a:ext cx="10607040" cy="5632311"/>
+          </a:xfrm>
+          <a:prstGeom prst="rect">
+            <a:avLst/>
+          </a:prstGeom>
+          <a:noFill/>
+        </p:spPr>
+        <p:txBody>
+          <a:bodyPr wrap="square">
+            <a:spAutoFit/>
+          </a:bodyPr>
+          <a:lstStyle/>
+          <a:p>
+            <a:r>
+              <a:rPr lang="en-US" sz="2400" b="1" dirty="0">
+                <a:solidFill>
+                  <a:schemeClr val="accent6">
+                    <a:lumMod val="60000"/>
+                    <a:lumOff val="40000"/>
+                  </a:schemeClr>
+                </a:solidFill>
+              </a:rPr>
+              <a:t>Long-Term Memory:</a:t>
+            </a:r>
+          </a:p>
+          <a:p>
+            <a:endParaRPr lang="en-US" sz="2400" b="1" dirty="0">
+              <a:solidFill>
+                <a:schemeClr val="accent6">
+                  <a:lumMod val="60000"/>
+                  <a:lumOff val="40000"/>
+                </a:schemeClr>
+              </a:solidFill>
+            </a:endParaRPr>
+          </a:p>
+          <a:p>
+            <a:r>
+              <a:rPr lang="en-US" sz="2400" dirty="0">
+                <a:solidFill>
+                  <a:schemeClr val="accent6">
+                    <a:lumMod val="60000"/>
+                    <a:lumOff val="40000"/>
+                  </a:schemeClr>
+                </a:solidFill>
+              </a:rPr>
+              <a:t>Long-term memory is persisted in a database, retrievable when needed, growing indefinitely. </a:t>
+            </a:r>
+          </a:p>
+          <a:p>
+            <a:endParaRPr lang="en-US" sz="2400" dirty="0">
+              <a:solidFill>
+                <a:schemeClr val="accent6">
+                  <a:lumMod val="60000"/>
+                  <a:lumOff val="40000"/>
+                </a:schemeClr>
+              </a:solidFill>
+            </a:endParaRPr>
+          </a:p>
+          <a:p>
+            <a:r>
+              <a:rPr lang="en-US" sz="2400" dirty="0">
+                <a:solidFill>
+                  <a:schemeClr val="accent6">
+                    <a:lumMod val="60000"/>
+                    <a:lumOff val="40000"/>
+                  </a:schemeClr>
+                </a:solidFill>
+              </a:rPr>
+              <a:t>When a new session starts, the agent doesn't load all of long-term memory into context (that would overflow it). Instead, it fetches only what's relevant to the current task.</a:t>
+            </a:r>
+          </a:p>
+          <a:p>
+            <a:endParaRPr lang="en-US" sz="2400" dirty="0">
+              <a:solidFill>
+                <a:schemeClr val="accent6">
+                  <a:lumMod val="60000"/>
+                  <a:lumOff val="40000"/>
+                </a:schemeClr>
+              </a:solidFill>
+            </a:endParaRPr>
+          </a:p>
+          <a:p>
+            <a:r>
+              <a:rPr lang="en-US" sz="2400" dirty="0">
+                <a:solidFill>
+                  <a:schemeClr val="accent6">
+                    <a:lumMod val="60000"/>
+                    <a:lumOff val="40000"/>
+                  </a:schemeClr>
+                </a:solidFill>
+              </a:rPr>
+              <a:t>The question is: how do you know what's relevant? </a:t>
+            </a:r>
+          </a:p>
+          <a:p>
+            <a:pPr marL="457200" indent="-457200">
+              <a:buFont typeface="+mj-lt"/>
+              <a:buAutoNum type="arabicPeriod"/>
+            </a:pPr>
+            <a:r>
+              <a:rPr lang="en-US" sz="2400" dirty="0">
+                <a:solidFill>
+                  <a:schemeClr val="accent6">
+                    <a:lumMod val="60000"/>
+                    <a:lumOff val="40000"/>
+                  </a:schemeClr>
+                </a:solidFill>
+              </a:rPr>
+              <a:t>For structured data — account numbers, transaction records, customer profiles — a standard SQL database query works fine. You search by ID or date, get back exact rows.</a:t>
+            </a:r>
+          </a:p>
+          <a:p>
+            <a:pPr marL="457200" indent="-457200">
+              <a:buFont typeface="+mj-lt"/>
+              <a:buAutoNum type="arabicPeriod"/>
+            </a:pPr>
+            <a:r>
+              <a:rPr lang="en-US" sz="2400" dirty="0">
+                <a:solidFill>
+                  <a:schemeClr val="accent6">
+                    <a:lumMod val="60000"/>
+                    <a:lumOff val="40000"/>
+                  </a:schemeClr>
+                </a:solidFill>
+              </a:rPr>
+              <a:t>For unstructured knowledge — past conversations, documents, notes, emails — exact-match SQL fails. You use vector databases.</a:t>
+            </a:r>
+          </a:p>
+        </p:txBody>
+      </p:sp>
+    </p:spTree>
+    <p:extLst>
+      <p:ext uri="{BB962C8B-B14F-4D97-AF65-F5344CB8AC3E}">
+        <p14:creationId xmlns:p14="http://schemas.microsoft.com/office/powerpoint/2010/main" val="2130995780"/>
+      </p:ext>
+    </p:extLst>
+  </p:cSld>
+  <p:clrMapOvr>
+    <a:masterClrMapping/>
+  </p:clrMapOvr>
+</p:sld>
+</file>
+
+<file path=ppt/slides/slide8.xml><?xml version="1.0" encoding="utf-8"?>
+<p:sld xmlns:a="http://schemas.openxmlformats.org/drawingml/2006/main" xmlns:r="http://schemas.openxmlformats.org/officeDocument/2006/relationships" xmlns:p="http://schemas.openxmlformats.org/presentationml/2006/main">
+  <p:cSld>
+    <p:spTree>
+      <p:nvGrpSpPr>
+        <p:cNvPr id="1" name="">
+          <a:extLst>
+            <a:ext uri="{FF2B5EF4-FFF2-40B4-BE49-F238E27FC236}">
+              <a16:creationId xmlns:a16="http://schemas.microsoft.com/office/drawing/2014/main" id="{CF63EF23-9000-16F3-86FD-5AF4808859FB}"/>
+            </a:ext>
+          </a:extLst>
+        </p:cNvPr>
+        <p:cNvGrpSpPr/>
+        <p:nvPr/>
+      </p:nvGrpSpPr>
+      <p:grpSpPr>
+        <a:xfrm>
+          <a:off x="0" y="0"/>
+          <a:ext cx="0" cy="0"/>
+          <a:chOff x="0" y="0"/>
+          <a:chExt cx="0" cy="0"/>
+        </a:xfrm>
+      </p:grpSpPr>
+      <p:sp>
+        <p:nvSpPr>
+          <p:cNvPr id="5" name="TextBox 4">
+            <a:extLst>
+              <a:ext uri="{FF2B5EF4-FFF2-40B4-BE49-F238E27FC236}">
+                <a16:creationId xmlns:a16="http://schemas.microsoft.com/office/drawing/2014/main" id="{5E0C9829-07E1-F63C-A3E4-21BDAFE6D898}"/>
+              </a:ext>
+            </a:extLst>
+          </p:cNvPr>
+          <p:cNvSpPr txBox="1"/>
+          <p:nvPr/>
+        </p:nvSpPr>
+        <p:spPr>
+          <a:xfrm>
+            <a:off x="100584" y="304628"/>
+            <a:ext cx="10607040" cy="1200329"/>
+          </a:xfrm>
+          <a:prstGeom prst="rect">
+            <a:avLst/>
+          </a:prstGeom>
+          <a:noFill/>
+        </p:spPr>
+        <p:txBody>
+          <a:bodyPr wrap="square">
+            <a:spAutoFit/>
+          </a:bodyPr>
+          <a:lstStyle/>
+          <a:p>
+            <a:r>
+              <a:rPr lang="en-US" sz="2400" b="1" dirty="0">
+                <a:solidFill>
+                  <a:schemeClr val="accent6">
+                    <a:lumMod val="60000"/>
+                    <a:lumOff val="40000"/>
+                  </a:schemeClr>
+                </a:solidFill>
+              </a:rPr>
+              <a:t>Best Official documentation:</a:t>
+            </a:r>
+          </a:p>
+          <a:p>
+            <a:br>
+              <a:rPr lang="en-US" sz="2400" b="1" dirty="0">
+                <a:solidFill>
+                  <a:schemeClr val="accent6">
+                    <a:lumMod val="60000"/>
+                    <a:lumOff val="40000"/>
+                  </a:schemeClr>
+                </a:solidFill>
+              </a:rPr>
+            </a:br>
+            <a:r>
+              <a:rPr lang="en-US" sz="2400" dirty="0">
+                <a:solidFill>
+                  <a:schemeClr val="accent6">
+                    <a:lumMod val="60000"/>
+                    <a:lumOff val="40000"/>
+                  </a:schemeClr>
+                </a:solidFill>
+              </a:rPr>
+              <a:t>https://docs.langchain.com/oss/python/concepts/memory</a:t>
+            </a:r>
+          </a:p>
+        </p:txBody>
+      </p:sp>
+    </p:spTree>
+    <p:extLst>
+      <p:ext uri="{BB962C8B-B14F-4D97-AF65-F5344CB8AC3E}">
+        <p14:creationId xmlns:p14="http://schemas.microsoft.com/office/powerpoint/2010/main" val="2784093989"/>
+      </p:ext>
+    </p:extLst>
+  </p:cSld>
+  <p:clrMapOvr>
+    <a:masterClrMapping/>
+  </p:clrMapOvr>
+</p:sld>
+</file>
+
+<file path=ppt/slides/slide9.xml><?xml version="1.0" encoding="utf-8"?>
+<p:sld xmlns:a="http://schemas.openxmlformats.org/drawingml/2006/main" xmlns:r="http://schemas.openxmlformats.org/officeDocument/2006/relationships" xmlns:p="http://schemas.openxmlformats.org/presentationml/2006/main">
+  <p:cSld>
+    <p:spTree>
+      <p:nvGrpSpPr>
+        <p:cNvPr id="1" name="">
+          <a:extLst>
+            <a:ext uri="{FF2B5EF4-FFF2-40B4-BE49-F238E27FC236}">
+              <a16:creationId xmlns:a16="http://schemas.microsoft.com/office/drawing/2014/main" id="{99424736-A728-E40F-4B08-F26E6CD1BEAC}"/>
+            </a:ext>
+          </a:extLst>
+        </p:cNvPr>
+        <p:cNvGrpSpPr/>
+        <p:nvPr/>
+      </p:nvGrpSpPr>
+      <p:grpSpPr>
+        <a:xfrm>
+          <a:off x="0" y="0"/>
+          <a:ext cx="0" cy="0"/>
+          <a:chOff x="0" y="0"/>
+          <a:chExt cx="0" cy="0"/>
+        </a:xfrm>
+      </p:grpSpPr>
+      <p:sp>
+        <p:nvSpPr>
+          <p:cNvPr id="4" name="TextBox 3">
+            <a:extLst>
+              <a:ext uri="{FF2B5EF4-FFF2-40B4-BE49-F238E27FC236}">
+                <a16:creationId xmlns:a16="http://schemas.microsoft.com/office/drawing/2014/main" id="{CE0FA625-50E0-A420-4B0D-D9864C7FAC66}"/>
+              </a:ext>
+            </a:extLst>
+          </p:cNvPr>
+          <p:cNvSpPr txBox="1"/>
+          <p:nvPr/>
+        </p:nvSpPr>
+        <p:spPr>
+          <a:xfrm>
+            <a:off x="100584" y="304628"/>
+            <a:ext cx="10607040" cy="5632311"/>
+          </a:xfrm>
+          <a:prstGeom prst="rect">
+            <a:avLst/>
+          </a:prstGeom>
+          <a:noFill/>
+        </p:spPr>
+        <p:txBody>
+          <a:bodyPr wrap="square">
+            <a:spAutoFit/>
+          </a:bodyPr>
+          <a:lstStyle/>
+          <a:p>
+            <a:r>
+              <a:rPr lang="en-US" sz="2400" b="1" dirty="0">
+                <a:solidFill>
+                  <a:schemeClr val="accent6">
+                    <a:lumMod val="60000"/>
+                    <a:lumOff val="40000"/>
+                  </a:schemeClr>
+                </a:solidFill>
+              </a:rPr>
+              <a:t>Discussion Prompt for Class</a:t>
+            </a:r>
+          </a:p>
+          <a:p>
+            <a:endParaRPr lang="en-US" sz="2400" b="1" dirty="0">
+              <a:solidFill>
+                <a:schemeClr val="accent6">
+                  <a:lumMod val="60000"/>
+                  <a:lumOff val="40000"/>
+                </a:schemeClr>
+              </a:solidFill>
+            </a:endParaRPr>
+          </a:p>
+          <a:p>
+            <a:r>
+              <a:rPr lang="en-US" sz="2400" i="1" dirty="0">
+                <a:solidFill>
+                  <a:schemeClr val="accent6">
+                    <a:lumMod val="60000"/>
+                    <a:lumOff val="40000"/>
+                  </a:schemeClr>
+                </a:solidFill>
+              </a:rPr>
+              <a:t>"A fintech agent remembers everything a customer has ever said —</a:t>
+            </a:r>
+          </a:p>
+          <a:p>
+            <a:r>
+              <a:rPr lang="en-US" sz="2400" i="1" dirty="0">
+                <a:solidFill>
+                  <a:schemeClr val="accent6">
+                    <a:lumMod val="60000"/>
+                    <a:lumOff val="40000"/>
+                  </a:schemeClr>
+                </a:solidFill>
+              </a:rPr>
+              <a:t> their financial worries, </a:t>
+            </a:r>
+          </a:p>
+          <a:p>
+            <a:r>
+              <a:rPr lang="en-US" sz="2400" i="1" dirty="0">
+                <a:solidFill>
+                  <a:schemeClr val="accent6">
+                    <a:lumMod val="60000"/>
+                    <a:lumOff val="40000"/>
+                  </a:schemeClr>
+                </a:solidFill>
+              </a:rPr>
+              <a:t>their family situation, </a:t>
+            </a:r>
+          </a:p>
+          <a:p>
+            <a:r>
+              <a:rPr lang="en-US" sz="2400" i="1" dirty="0">
+                <a:solidFill>
+                  <a:schemeClr val="accent6">
+                    <a:lumMod val="60000"/>
+                    <a:lumOff val="40000"/>
+                  </a:schemeClr>
+                </a:solidFill>
+              </a:rPr>
+              <a:t>their investment fears. </a:t>
+            </a:r>
+          </a:p>
+          <a:p>
+            <a:endParaRPr lang="en-US" sz="2400" i="1" dirty="0">
+              <a:solidFill>
+                <a:schemeClr val="accent6">
+                  <a:lumMod val="60000"/>
+                  <a:lumOff val="40000"/>
+                </a:schemeClr>
+              </a:solidFill>
+            </a:endParaRPr>
+          </a:p>
+          <a:p>
+            <a:r>
+              <a:rPr lang="en-US" sz="2400" i="1" dirty="0">
+                <a:solidFill>
+                  <a:schemeClr val="accent6">
+                    <a:lumMod val="60000"/>
+                    <a:lumOff val="40000"/>
+                  </a:schemeClr>
+                </a:solidFill>
+              </a:rPr>
+              <a:t>This makes it far more helpful. </a:t>
+            </a:r>
+          </a:p>
+          <a:p>
+            <a:r>
+              <a:rPr lang="en-US" sz="2400" i="1" dirty="0">
+                <a:solidFill>
+                  <a:schemeClr val="accent6">
+                    <a:lumMod val="60000"/>
+                    <a:lumOff val="40000"/>
+                  </a:schemeClr>
+                </a:solidFill>
+              </a:rPr>
+              <a:t>But it also means someone is storing a detailed psychological and financial profile of every customer. </a:t>
+            </a:r>
+          </a:p>
+          <a:p>
+            <a:endParaRPr lang="en-US" sz="2400" i="1" dirty="0">
+              <a:solidFill>
+                <a:schemeClr val="accent6">
+                  <a:lumMod val="60000"/>
+                  <a:lumOff val="40000"/>
+                </a:schemeClr>
+              </a:solidFill>
+            </a:endParaRPr>
+          </a:p>
+          <a:p>
+            <a:r>
+              <a:rPr lang="en-US" sz="2400" i="1" dirty="0">
+                <a:solidFill>
+                  <a:schemeClr val="accent6">
+                    <a:lumMod val="60000"/>
+                    <a:lumOff val="40000"/>
+                  </a:schemeClr>
+                </a:solidFill>
+              </a:rPr>
+              <a:t>Who owns that memory? </a:t>
+            </a:r>
+          </a:p>
+          <a:p>
+            <a:r>
+              <a:rPr lang="en-US" sz="2400" i="1" dirty="0">
+                <a:solidFill>
+                  <a:schemeClr val="accent6">
+                    <a:lumMod val="60000"/>
+                    <a:lumOff val="40000"/>
+                  </a:schemeClr>
+                </a:solidFill>
+              </a:rPr>
+              <a:t>Can the customer delete it? </a:t>
+            </a:r>
+          </a:p>
+          <a:p>
+            <a:r>
+              <a:rPr lang="en-US" sz="2400" i="1" dirty="0">
+                <a:solidFill>
+                  <a:schemeClr val="accent6">
+                    <a:lumMod val="60000"/>
+                    <a:lumOff val="40000"/>
+                  </a:schemeClr>
+                </a:solidFill>
+              </a:rPr>
+              <a:t>What if the bank is acquired? </a:t>
+            </a:r>
+          </a:p>
+          <a:p>
+            <a:r>
+              <a:rPr lang="en-US" sz="2400" i="1" dirty="0">
+                <a:solidFill>
+                  <a:schemeClr val="accent6">
+                    <a:lumMod val="60000"/>
+                    <a:lumOff val="40000"/>
+                  </a:schemeClr>
+                </a:solidFill>
+              </a:rPr>
+              <a:t>Should there be a 'right to be forgotten' for AI memory?"</a:t>
+            </a:r>
+            <a:endParaRPr lang="en-US" sz="2400" dirty="0">
+              <a:solidFill>
+                <a:schemeClr val="accent6">
+                  <a:lumMod val="60000"/>
+                  <a:lumOff val="40000"/>
+                </a:schemeClr>
+              </a:solidFill>
+            </a:endParaRPr>
+          </a:p>
+        </p:txBody>
+      </p:sp>
+    </p:spTree>
+    <p:extLst>
+      <p:ext uri="{BB962C8B-B14F-4D97-AF65-F5344CB8AC3E}">
+        <p14:creationId xmlns:p14="http://schemas.microsoft.com/office/powerpoint/2010/main" val="848120013"/>
       </p:ext>
     </p:extLst>
   </p:cSld>

--- a/AgenticAI/2-Core-Concepts/4_memory_in_agents.pptx
+++ b/AgenticAI/2-Core-Concepts/4_memory_in_agents.pptx
@@ -226,7 +226,7 @@
           <a:p>
             <a:fld id="{7BAEECA8-D063-486F-AE31-5020270C1449}" type="datetimeFigureOut">
               <a:rPr lang="en-US" smtClean="0"/>
-              <a:t>9/14/2026</a:t>
+              <a:t>9/16/2026</a:t>
             </a:fld>
             <a:endParaRPr lang="en-US"/>
           </a:p>
@@ -403,7 +403,7 @@
           <a:p>
             <a:fld id="{CB233BD1-3BA8-448D-9D08-7846095EA517}" type="datetimeFigureOut">
               <a:rPr lang="en-US" smtClean="0"/>
-              <a:t>9/14/2026</a:t>
+              <a:t>9/16/2026</a:t>
             </a:fld>
             <a:endParaRPr lang="en-US"/>
           </a:p>
@@ -817,7 +817,7 @@
           <a:p>
             <a:fld id="{6383FAE1-13DE-4511-8C1B-C8AFB720664C}" type="datetimeFigureOut">
               <a:rPr lang="en-US" smtClean="0"/>
-              <a:t>9/14/2026</a:t>
+              <a:t>9/16/2026</a:t>
             </a:fld>
             <a:endParaRPr lang="en-US"/>
           </a:p>
@@ -1015,7 +1015,7 @@
           <a:p>
             <a:fld id="{6383FAE1-13DE-4511-8C1B-C8AFB720664C}" type="datetimeFigureOut">
               <a:rPr lang="en-US" smtClean="0"/>
-              <a:t>9/14/2026</a:t>
+              <a:t>9/16/2026</a:t>
             </a:fld>
             <a:endParaRPr lang="en-US"/>
           </a:p>
@@ -1223,7 +1223,7 @@
           <a:p>
             <a:fld id="{6383FAE1-13DE-4511-8C1B-C8AFB720664C}" type="datetimeFigureOut">
               <a:rPr lang="en-US" smtClean="0"/>
-              <a:t>9/14/2026</a:t>
+              <a:t>9/16/2026</a:t>
             </a:fld>
             <a:endParaRPr lang="en-US"/>
           </a:p>
@@ -1421,7 +1421,7 @@
           <a:p>
             <a:fld id="{6383FAE1-13DE-4511-8C1B-C8AFB720664C}" type="datetimeFigureOut">
               <a:rPr lang="en-US" smtClean="0"/>
-              <a:t>9/14/2026</a:t>
+              <a:t>9/16/2026</a:t>
             </a:fld>
             <a:endParaRPr lang="en-US"/>
           </a:p>
@@ -1696,7 +1696,7 @@
           <a:p>
             <a:fld id="{6383FAE1-13DE-4511-8C1B-C8AFB720664C}" type="datetimeFigureOut">
               <a:rPr lang="en-US" smtClean="0"/>
-              <a:t>9/14/2026</a:t>
+              <a:t>9/16/2026</a:t>
             </a:fld>
             <a:endParaRPr lang="en-US"/>
           </a:p>
@@ -1961,7 +1961,7 @@
           <a:p>
             <a:fld id="{6383FAE1-13DE-4511-8C1B-C8AFB720664C}" type="datetimeFigureOut">
               <a:rPr lang="en-US" smtClean="0"/>
-              <a:t>9/14/2026</a:t>
+              <a:t>9/16/2026</a:t>
             </a:fld>
             <a:endParaRPr lang="en-US"/>
           </a:p>
@@ -2373,7 +2373,7 @@
           <a:p>
             <a:fld id="{6383FAE1-13DE-4511-8C1B-C8AFB720664C}" type="datetimeFigureOut">
               <a:rPr lang="en-US" smtClean="0"/>
-              <a:t>9/14/2026</a:t>
+              <a:t>9/16/2026</a:t>
             </a:fld>
             <a:endParaRPr lang="en-US"/>
           </a:p>
@@ -2514,7 +2514,7 @@
           <a:p>
             <a:fld id="{6383FAE1-13DE-4511-8C1B-C8AFB720664C}" type="datetimeFigureOut">
               <a:rPr lang="en-US" smtClean="0"/>
-              <a:t>9/14/2026</a:t>
+              <a:t>9/16/2026</a:t>
             </a:fld>
             <a:endParaRPr lang="en-US"/>
           </a:p>
@@ -2627,7 +2627,7 @@
           <a:p>
             <a:fld id="{6383FAE1-13DE-4511-8C1B-C8AFB720664C}" type="datetimeFigureOut">
               <a:rPr lang="en-US" smtClean="0"/>
-              <a:t>9/14/2026</a:t>
+              <a:t>9/16/2026</a:t>
             </a:fld>
             <a:endParaRPr lang="en-US"/>
           </a:p>
@@ -2938,7 +2938,7 @@
           <a:p>
             <a:fld id="{6383FAE1-13DE-4511-8C1B-C8AFB720664C}" type="datetimeFigureOut">
               <a:rPr lang="en-US" smtClean="0"/>
-              <a:t>9/14/2026</a:t>
+              <a:t>9/16/2026</a:t>
             </a:fld>
             <a:endParaRPr lang="en-US"/>
           </a:p>
@@ -3229,7 +3229,7 @@
           <a:p>
             <a:fld id="{6383FAE1-13DE-4511-8C1B-C8AFB720664C}" type="datetimeFigureOut">
               <a:rPr lang="en-US" smtClean="0"/>
-              <a:t>9/14/2026</a:t>
+              <a:t>9/16/2026</a:t>
             </a:fld>
             <a:endParaRPr lang="en-US"/>
           </a:p>
@@ -3473,7 +3473,7 @@
           <a:p>
             <a:fld id="{6383FAE1-13DE-4511-8C1B-C8AFB720664C}" type="datetimeFigureOut">
               <a:rPr lang="en-US" smtClean="0"/>
-              <a:t>9/14/2026</a:t>
+              <a:t>9/16/2026</a:t>
             </a:fld>
             <a:endParaRPr lang="en-US"/>
           </a:p>
@@ -4650,7 +4650,7 @@
                   </a:schemeClr>
                 </a:solidFill>
               </a:rPr>
-              <a:t>Example 1:</a:t>
+              <a:t>Example 1: (conversation 1)</a:t>
             </a:r>
           </a:p>
           <a:p>
@@ -4866,7 +4866,7 @@
         <p:spPr>
           <a:xfrm>
             <a:off x="4942332" y="1982462"/>
-            <a:ext cx="7016496" cy="2246769"/>
+            <a:ext cx="7016496" cy="3170099"/>
           </a:xfrm>
           <a:prstGeom prst="rect">
             <a:avLst/>
@@ -4888,10 +4888,20 @@
                   </a:schemeClr>
                 </a:solidFill>
               </a:rPr>
-              <a:t>Example 2:</a:t>
-            </a:r>
-          </a:p>
-          <a:p>
+              <a:t>Example 2: </a:t>
+            </a:r>
+            <a:r>
+              <a:rPr lang="en-IN" sz="2000" b="1" u="sng" dirty="0">
+                <a:solidFill>
+                  <a:schemeClr val="accent6">
+                    <a:lumMod val="60000"/>
+                    <a:lumOff val="40000"/>
+                  </a:schemeClr>
+                </a:solidFill>
+                <a:sym typeface="Wingdings" panose="05000000000000000000" pitchFamily="2" charset="2"/>
+              </a:rPr>
+              <a:t>(conversation 2)</a:t>
+            </a:r>
             <a:endParaRPr lang="en-IN" sz="2000" b="1" u="sng" dirty="0">
               <a:solidFill>
                 <a:schemeClr val="accent6">
@@ -4902,6 +4912,16 @@
             </a:endParaRPr>
           </a:p>
           <a:p>
+            <a:endParaRPr lang="en-IN" sz="2000" b="1" u="sng" dirty="0">
+              <a:solidFill>
+                <a:schemeClr val="accent6">
+                  <a:lumMod val="60000"/>
+                  <a:lumOff val="40000"/>
+                </a:schemeClr>
+              </a:solidFill>
+            </a:endParaRPr>
+          </a:p>
+          <a:p>
             <a:r>
               <a:rPr lang="en-IN" sz="2000" b="1" u="sng" dirty="0">
                 <a:solidFill>
@@ -5026,7 +5046,30 @@
                   </a:schemeClr>
                 </a:solidFill>
               </a:rPr>
-              <a:t>: </a:t>
+              <a:t>: 10,193 </a:t>
+            </a:r>
+            <a:r>
+              <a:rPr lang="en-US" sz="2000" dirty="0">
+                <a:solidFill>
+                  <a:schemeClr val="accent4">
+                    <a:lumMod val="60000"/>
+                    <a:lumOff val="40000"/>
+                  </a:schemeClr>
+                </a:solidFill>
+              </a:rPr>
+              <a:t> </a:t>
+            </a:r>
+            <a:r>
+              <a:rPr lang="en-US" sz="2000" dirty="0">
+                <a:solidFill>
+                  <a:schemeClr val="accent4">
+                    <a:lumMod val="60000"/>
+                    <a:lumOff val="40000"/>
+                  </a:schemeClr>
+                </a:solidFill>
+                <a:sym typeface="Wingdings" panose="05000000000000000000" pitchFamily="2" charset="2"/>
+              </a:rPr>
+              <a:t> </a:t>
             </a:r>
             <a:r>
               <a:rPr lang="en-US" sz="2000" b="1" dirty="0">
@@ -5037,9 +5080,11 @@
                   </a:schemeClr>
                 </a:solidFill>
               </a:rPr>
-              <a:t>(The agent may hallucinate and make up wrong figures)</a:t>
-            </a:r>
-            <a:endParaRPr lang="en-IN" sz="2000" b="1" dirty="0">
+              <a:t>The agent remembers</a:t>
+            </a:r>
+          </a:p>
+          <a:p>
+            <a:endParaRPr lang="en-US" sz="2000" b="1" dirty="0">
               <a:solidFill>
                 <a:schemeClr val="accent4">
                   <a:lumMod val="60000"/>
@@ -5047,6 +5092,65 @@
                 </a:schemeClr>
               </a:solidFill>
             </a:endParaRPr>
+          </a:p>
+          <a:p>
+            <a:r>
+              <a:rPr lang="en-IN" sz="2000" b="1" u="sng" dirty="0">
+                <a:solidFill>
+                  <a:schemeClr val="accent6">
+                    <a:lumMod val="60000"/>
+                    <a:lumOff val="40000"/>
+                  </a:schemeClr>
+                </a:solidFill>
+              </a:rPr>
+              <a:t>User</a:t>
+            </a:r>
+            <a:r>
+              <a:rPr lang="en-IN" sz="2000" dirty="0">
+                <a:solidFill>
+                  <a:schemeClr val="accent6">
+                    <a:lumMod val="60000"/>
+                    <a:lumOff val="40000"/>
+                  </a:schemeClr>
+                </a:solidFill>
+              </a:rPr>
+              <a:t>: What is my name?</a:t>
+            </a:r>
+          </a:p>
+          <a:p>
+            <a:r>
+              <a:rPr lang="en-IN" sz="2000" b="1" u="sng" dirty="0">
+                <a:solidFill>
+                  <a:schemeClr val="accent6">
+                    <a:lumMod val="60000"/>
+                    <a:lumOff val="40000"/>
+                  </a:schemeClr>
+                </a:solidFill>
+              </a:rPr>
+              <a:t>Agent:</a:t>
+            </a:r>
+            <a:r>
+              <a:rPr lang="en-IN" sz="2000" dirty="0">
+                <a:solidFill>
+                  <a:schemeClr val="accent6">
+                    <a:lumMod val="60000"/>
+                    <a:lumOff val="40000"/>
+                  </a:schemeClr>
+                </a:solidFill>
+              </a:rPr>
+              <a:t> </a:t>
+            </a:r>
+            <a:r>
+              <a:rPr lang="en-IN" sz="2000" b="1" i="1" dirty="0">
+                <a:solidFill>
+                  <a:schemeClr val="accent4">
+                    <a:lumMod val="60000"/>
+                    <a:lumOff val="40000"/>
+                  </a:schemeClr>
+                </a:solidFill>
+              </a:rPr>
+              <a:t>Ash    &lt;-- It does NOT remember conversation 1.</a:t>
+            </a:r>
           </a:p>
         </p:txBody>
       </p:sp>
@@ -5143,7 +5247,7 @@
         <p:spPr>
           <a:xfrm>
             <a:off x="522732" y="1687174"/>
-            <a:ext cx="3656076" cy="3447098"/>
+            <a:ext cx="3976116" cy="3170099"/>
           </a:xfrm>
           <a:prstGeom prst="rect">
             <a:avLst/>
